--- a/Lecture Resources/Lecture Powerpoints/Chunk 6 - Functions.pptx
+++ b/Lecture Resources/Lecture Powerpoints/Chunk 6 - Functions.pptx
@@ -122,6 +122,14 @@
 </p:presentation>
 </file>
 
+<file path=ppt/revisionInfo.xml><?xml version="1.0" encoding="utf-8"?>
+<p1510:revInfo xmlns:a="http://schemas.openxmlformats.org/drawingml/2006/main" xmlns:r="http://schemas.openxmlformats.org/officeDocument/2006/relationships" xmlns:p1510="http://schemas.microsoft.com/office/powerpoint/2015/10/main">
+  <p1510:revLst>
+    <p1510:client id="{B01DBB03-A3C5-42F7-8C58-22B33CBCF15F}" v="8" dt="2025-10-07T22:39:44.886"/>
+  </p1510:revLst>
+</p1510:revInfo>
+</file>
+
 <file path=ppt/changesInfos/changesInfo1.xml><?xml version="1.0" encoding="utf-8"?>
 <pc:chgInfo xmlns:a="http://schemas.openxmlformats.org/drawingml/2006/main" xmlns:r="http://schemas.openxmlformats.org/officeDocument/2006/relationships" xmlns:ac="http://schemas.microsoft.com/office/drawing/2013/main/command" xmlns:pc="http://schemas.microsoft.com/office/powerpoint/2013/main/command">
   <pc:docChgLst>
@@ -213,7 +221,7 @@
   <pc:docChgLst>
     <pc:chgData name="Jonathan Bollig" userId="8b5d0afe-f106-45e0-8c3f-fd98fa124db1" providerId="ADAL" clId="{B2469FA9-EBD8-4834-A16D-CBF8EFC907DD}"/>
     <pc:docChg chg="undo redo custSel addSld delSld modSld">
-      <pc:chgData name="Jonathan Bollig" userId="8b5d0afe-f106-45e0-8c3f-fd98fa124db1" providerId="ADAL" clId="{B2469FA9-EBD8-4834-A16D-CBF8EFC907DD}" dt="2025-10-07T14:27:21.091" v="2905" actId="47"/>
+      <pc:chgData name="Jonathan Bollig" userId="8b5d0afe-f106-45e0-8c3f-fd98fa124db1" providerId="ADAL" clId="{B2469FA9-EBD8-4834-A16D-CBF8EFC907DD}" dt="2025-10-07T22:39:44.886" v="2913"/>
       <pc:docMkLst>
         <pc:docMk/>
       </pc:docMkLst>
@@ -1006,8 +1014,8 @@
           <pc:sldMk cId="766000052" sldId="274"/>
         </pc:sldMkLst>
       </pc:sldChg>
-      <pc:sldChg chg="addSp modSp new mod">
-        <pc:chgData name="Jonathan Bollig" userId="8b5d0afe-f106-45e0-8c3f-fd98fa124db1" providerId="ADAL" clId="{B2469FA9-EBD8-4834-A16D-CBF8EFC907DD}" dt="2025-10-04T21:37:47.148" v="2744" actId="14100"/>
+      <pc:sldChg chg="addSp modSp new mod modAnim">
+        <pc:chgData name="Jonathan Bollig" userId="8b5d0afe-f106-45e0-8c3f-fd98fa124db1" providerId="ADAL" clId="{B2469FA9-EBD8-4834-A16D-CBF8EFC907DD}" dt="2025-10-07T22:39:44.886" v="2913"/>
         <pc:sldMkLst>
           <pc:docMk/>
           <pc:sldMk cId="3877654343" sldId="275"/>
@@ -1029,13 +1037,21 @@
           </ac:spMkLst>
         </pc:spChg>
         <pc:spChg chg="add mod">
-          <ac:chgData name="Jonathan Bollig" userId="8b5d0afe-f106-45e0-8c3f-fd98fa124db1" providerId="ADAL" clId="{B2469FA9-EBD8-4834-A16D-CBF8EFC907DD}" dt="2025-10-04T21:37:36.596" v="2740" actId="1076"/>
+          <ac:chgData name="Jonathan Bollig" userId="8b5d0afe-f106-45e0-8c3f-fd98fa124db1" providerId="ADAL" clId="{B2469FA9-EBD8-4834-A16D-CBF8EFC907DD}" dt="2025-10-07T22:39:23.789" v="2907" actId="164"/>
           <ac:spMkLst>
             <pc:docMk/>
             <pc:sldMk cId="3877654343" sldId="275"/>
             <ac:spMk id="10" creationId="{1ED2D7D5-7874-4F0E-AFD9-95B42561AEE9}"/>
           </ac:spMkLst>
         </pc:spChg>
+        <pc:grpChg chg="add mod">
+          <ac:chgData name="Jonathan Bollig" userId="8b5d0afe-f106-45e0-8c3f-fd98fa124db1" providerId="ADAL" clId="{B2469FA9-EBD8-4834-A16D-CBF8EFC907DD}" dt="2025-10-07T22:39:23.789" v="2907" actId="164"/>
+          <ac:grpSpMkLst>
+            <pc:docMk/>
+            <pc:sldMk cId="3877654343" sldId="275"/>
+            <ac:grpSpMk id="4" creationId="{6A9BC1EE-38D7-CEC7-263A-DE1227820608}"/>
+          </ac:grpSpMkLst>
+        </pc:grpChg>
         <pc:picChg chg="add mod">
           <ac:chgData name="Jonathan Bollig" userId="8b5d0afe-f106-45e0-8c3f-fd98fa124db1" providerId="ADAL" clId="{B2469FA9-EBD8-4834-A16D-CBF8EFC907DD}" dt="2025-10-04T21:34:15.378" v="2720" actId="1076"/>
           <ac:picMkLst>
@@ -1045,7 +1061,7 @@
           </ac:picMkLst>
         </pc:picChg>
         <pc:picChg chg="add mod">
-          <ac:chgData name="Jonathan Bollig" userId="8b5d0afe-f106-45e0-8c3f-fd98fa124db1" providerId="ADAL" clId="{B2469FA9-EBD8-4834-A16D-CBF8EFC907DD}" dt="2025-10-04T21:36:31.339" v="2728" actId="1076"/>
+          <ac:chgData name="Jonathan Bollig" userId="8b5d0afe-f106-45e0-8c3f-fd98fa124db1" providerId="ADAL" clId="{B2469FA9-EBD8-4834-A16D-CBF8EFC907DD}" dt="2025-10-07T22:39:23.789" v="2907" actId="164"/>
           <ac:picMkLst>
             <pc:docMk/>
             <pc:sldMk cId="3877654343" sldId="275"/>
@@ -1061,7 +1077,7 @@
           </ac:picMkLst>
         </pc:picChg>
         <pc:cxnChg chg="add mod">
-          <ac:chgData name="Jonathan Bollig" userId="8b5d0afe-f106-45e0-8c3f-fd98fa124db1" providerId="ADAL" clId="{B2469FA9-EBD8-4834-A16D-CBF8EFC907DD}" dt="2025-10-04T21:37:47.148" v="2744" actId="14100"/>
+          <ac:chgData name="Jonathan Bollig" userId="8b5d0afe-f106-45e0-8c3f-fd98fa124db1" providerId="ADAL" clId="{B2469FA9-EBD8-4834-A16D-CBF8EFC907DD}" dt="2025-10-07T22:39:23.789" v="2907" actId="164"/>
           <ac:cxnSpMkLst>
             <pc:docMk/>
             <pc:sldMk cId="3877654343" sldId="275"/>
@@ -1391,7 +1407,7 @@
           <a:p>
             <a:fld id="{0B6CA2EE-5589-4682-AD7F-744DBF1E81F5}" type="datetimeFigureOut">
               <a:rPr lang="de-DE" smtClean="0"/>
-              <a:t>07.10.2025</a:t>
+              <a:t>08.10.2025</a:t>
             </a:fld>
             <a:endParaRPr lang="de-DE"/>
           </a:p>
@@ -2372,7 +2388,7 @@
           <a:p>
             <a:fld id="{ADA51F25-4808-47F4-BF6E-BCDC230DB01C}" type="datetimeFigureOut">
               <a:rPr lang="de-DE" smtClean="0"/>
-              <a:t>07.10.2025</a:t>
+              <a:t>08.10.2025</a:t>
             </a:fld>
             <a:endParaRPr lang="de-DE"/>
           </a:p>
@@ -2570,7 +2586,7 @@
           <a:p>
             <a:fld id="{ADA51F25-4808-47F4-BF6E-BCDC230DB01C}" type="datetimeFigureOut">
               <a:rPr lang="de-DE" smtClean="0"/>
-              <a:t>07.10.2025</a:t>
+              <a:t>08.10.2025</a:t>
             </a:fld>
             <a:endParaRPr lang="de-DE"/>
           </a:p>
@@ -2778,7 +2794,7 @@
           <a:p>
             <a:fld id="{ADA51F25-4808-47F4-BF6E-BCDC230DB01C}" type="datetimeFigureOut">
               <a:rPr lang="de-DE" smtClean="0"/>
-              <a:t>07.10.2025</a:t>
+              <a:t>08.10.2025</a:t>
             </a:fld>
             <a:endParaRPr lang="de-DE"/>
           </a:p>
@@ -2976,7 +2992,7 @@
           <a:p>
             <a:fld id="{ADA51F25-4808-47F4-BF6E-BCDC230DB01C}" type="datetimeFigureOut">
               <a:rPr lang="de-DE" smtClean="0"/>
-              <a:t>07.10.2025</a:t>
+              <a:t>08.10.2025</a:t>
             </a:fld>
             <a:endParaRPr lang="de-DE"/>
           </a:p>
@@ -3251,7 +3267,7 @@
           <a:p>
             <a:fld id="{ADA51F25-4808-47F4-BF6E-BCDC230DB01C}" type="datetimeFigureOut">
               <a:rPr lang="de-DE" smtClean="0"/>
-              <a:t>07.10.2025</a:t>
+              <a:t>08.10.2025</a:t>
             </a:fld>
             <a:endParaRPr lang="de-DE"/>
           </a:p>
@@ -3516,7 +3532,7 @@
           <a:p>
             <a:fld id="{ADA51F25-4808-47F4-BF6E-BCDC230DB01C}" type="datetimeFigureOut">
               <a:rPr lang="de-DE" smtClean="0"/>
-              <a:t>07.10.2025</a:t>
+              <a:t>08.10.2025</a:t>
             </a:fld>
             <a:endParaRPr lang="de-DE"/>
           </a:p>
@@ -3928,7 +3944,7 @@
           <a:p>
             <a:fld id="{ADA51F25-4808-47F4-BF6E-BCDC230DB01C}" type="datetimeFigureOut">
               <a:rPr lang="de-DE" smtClean="0"/>
-              <a:t>07.10.2025</a:t>
+              <a:t>08.10.2025</a:t>
             </a:fld>
             <a:endParaRPr lang="de-DE"/>
           </a:p>
@@ -4069,7 +4085,7 @@
           <a:p>
             <a:fld id="{ADA51F25-4808-47F4-BF6E-BCDC230DB01C}" type="datetimeFigureOut">
               <a:rPr lang="de-DE" smtClean="0"/>
-              <a:t>07.10.2025</a:t>
+              <a:t>08.10.2025</a:t>
             </a:fld>
             <a:endParaRPr lang="de-DE"/>
           </a:p>
@@ -4182,7 +4198,7 @@
           <a:p>
             <a:fld id="{ADA51F25-4808-47F4-BF6E-BCDC230DB01C}" type="datetimeFigureOut">
               <a:rPr lang="de-DE" smtClean="0"/>
-              <a:t>07.10.2025</a:t>
+              <a:t>08.10.2025</a:t>
             </a:fld>
             <a:endParaRPr lang="de-DE"/>
           </a:p>
@@ -4493,7 +4509,7 @@
           <a:p>
             <a:fld id="{ADA51F25-4808-47F4-BF6E-BCDC230DB01C}" type="datetimeFigureOut">
               <a:rPr lang="de-DE" smtClean="0"/>
-              <a:t>07.10.2025</a:t>
+              <a:t>08.10.2025</a:t>
             </a:fld>
             <a:endParaRPr lang="de-DE"/>
           </a:p>
@@ -4781,7 +4797,7 @@
           <a:p>
             <a:fld id="{ADA51F25-4808-47F4-BF6E-BCDC230DB01C}" type="datetimeFigureOut">
               <a:rPr lang="de-DE" smtClean="0"/>
-              <a:t>07.10.2025</a:t>
+              <a:t>08.10.2025</a:t>
             </a:fld>
             <a:endParaRPr lang="de-DE"/>
           </a:p>
@@ -5022,7 +5038,7 @@
           <a:p>
             <a:fld id="{ADA51F25-4808-47F4-BF6E-BCDC230DB01C}" type="datetimeFigureOut">
               <a:rPr lang="de-DE" smtClean="0"/>
-              <a:t>07.10.2025</a:t>
+              <a:t>08.10.2025</a:t>
             </a:fld>
             <a:endParaRPr lang="de-DE"/>
           </a:p>
@@ -10304,10 +10320,10 @@
       </p:pic>
       <p:pic>
         <p:nvPicPr>
-          <p:cNvPr id="7" name="Grafik 6">
-            <a:extLst>
-              <a:ext uri="{FF2B5EF4-FFF2-40B4-BE49-F238E27FC236}">
-                <a16:creationId xmlns:a16="http://schemas.microsoft.com/office/drawing/2014/main" id="{1510E010-A9B1-C223-3DCA-24C70C8FC354}"/>
+          <p:cNvPr id="9" name="Grafik 8">
+            <a:extLst>
+              <a:ext uri="{FF2B5EF4-FFF2-40B4-BE49-F238E27FC236}">
+                <a16:creationId xmlns:a16="http://schemas.microsoft.com/office/drawing/2014/main" id="{B506FA52-C740-19F8-C631-8FF58276A6CB}"/>
               </a:ext>
             </a:extLst>
           </p:cNvPr>
@@ -10318,46 +10334,6 @@
         </p:nvPicPr>
         <p:blipFill>
           <a:blip r:embed="rId3"/>
-          <a:stretch>
-            <a:fillRect/>
-          </a:stretch>
-        </p:blipFill>
-        <p:spPr>
-          <a:xfrm>
-            <a:off x="4990101" y="5324921"/>
-            <a:ext cx="3705843" cy="605154"/>
-          </a:xfrm>
-          <a:prstGeom prst="rect">
-            <a:avLst/>
-          </a:prstGeom>
-          <a:ln>
-            <a:noFill/>
-          </a:ln>
-          <a:effectLst>
-            <a:outerShdw blurRad="292100" dist="139700" dir="2700000" algn="tl" rotWithShape="0">
-              <a:srgbClr val="333333">
-                <a:alpha val="65000"/>
-              </a:srgbClr>
-            </a:outerShdw>
-          </a:effectLst>
-        </p:spPr>
-      </p:pic>
-      <p:pic>
-        <p:nvPicPr>
-          <p:cNvPr id="9" name="Grafik 8">
-            <a:extLst>
-              <a:ext uri="{FF2B5EF4-FFF2-40B4-BE49-F238E27FC236}">
-                <a16:creationId xmlns:a16="http://schemas.microsoft.com/office/drawing/2014/main" id="{B506FA52-C740-19F8-C631-8FF58276A6CB}"/>
-              </a:ext>
-            </a:extLst>
-          </p:cNvPr>
-          <p:cNvPicPr>
-            <a:picLocks noChangeAspect="1"/>
-          </p:cNvPicPr>
-          <p:nvPr/>
-        </p:nvPicPr>
-        <p:blipFill>
-          <a:blip r:embed="rId4"/>
           <a:stretch>
             <a:fillRect/>
           </a:stretch>
@@ -10382,107 +10358,168 @@
           </a:effectLst>
         </p:spPr>
       </p:pic>
-      <p:sp>
-        <p:nvSpPr>
-          <p:cNvPr id="10" name="Rechteck 9">
-            <a:extLst>
-              <a:ext uri="{FF2B5EF4-FFF2-40B4-BE49-F238E27FC236}">
-                <a16:creationId xmlns:a16="http://schemas.microsoft.com/office/drawing/2014/main" id="{1ED2D7D5-7874-4F0E-AFD9-95B42561AEE9}"/>
-              </a:ext>
-            </a:extLst>
-          </p:cNvPr>
-          <p:cNvSpPr/>
+      <p:grpSp>
+        <p:nvGrpSpPr>
+          <p:cNvPr id="4" name="Gruppieren 3">
+            <a:extLst>
+              <a:ext uri="{FF2B5EF4-FFF2-40B4-BE49-F238E27FC236}">
+                <a16:creationId xmlns:a16="http://schemas.microsoft.com/office/drawing/2014/main" id="{6A9BC1EE-38D7-CEC7-263A-DE1227820608}"/>
+              </a:ext>
+            </a:extLst>
+          </p:cNvPr>
+          <p:cNvGrpSpPr/>
           <p:nvPr/>
-        </p:nvSpPr>
-        <p:spPr>
+        </p:nvGrpSpPr>
+        <p:grpSpPr>
           <a:xfrm>
-            <a:off x="9808704" y="5637467"/>
-            <a:ext cx="1383551" cy="585216"/>
+            <a:off x="4990101" y="5324921"/>
+            <a:ext cx="6202154" cy="897762"/>
+            <a:chOff x="4990101" y="5324921"/>
+            <a:chExt cx="6202154" cy="897762"/>
           </a:xfrm>
-          <a:prstGeom prst="rect">
-            <a:avLst/>
-          </a:prstGeom>
-          <a:ln w="28575">
-            <a:solidFill>
+        </p:grpSpPr>
+        <p:pic>
+          <p:nvPicPr>
+            <p:cNvPr id="7" name="Grafik 6">
+              <a:extLst>
+                <a:ext uri="{FF2B5EF4-FFF2-40B4-BE49-F238E27FC236}">
+                  <a16:creationId xmlns:a16="http://schemas.microsoft.com/office/drawing/2014/main" id="{1510E010-A9B1-C223-3DCA-24C70C8FC354}"/>
+                </a:ext>
+              </a:extLst>
+            </p:cNvPr>
+            <p:cNvPicPr>
+              <a:picLocks noChangeAspect="1"/>
+            </p:cNvPicPr>
+            <p:nvPr/>
+          </p:nvPicPr>
+          <p:blipFill>
+            <a:blip r:embed="rId4"/>
+            <a:stretch>
+              <a:fillRect/>
+            </a:stretch>
+          </p:blipFill>
+          <p:spPr>
+            <a:xfrm>
+              <a:off x="4990101" y="5324921"/>
+              <a:ext cx="3705843" cy="605154"/>
+            </a:xfrm>
+            <a:prstGeom prst="rect">
+              <a:avLst/>
+            </a:prstGeom>
+            <a:ln>
+              <a:noFill/>
+            </a:ln>
+            <a:effectLst>
+              <a:outerShdw blurRad="292100" dist="139700" dir="2700000" algn="tl" rotWithShape="0">
+                <a:srgbClr val="333333">
+                  <a:alpha val="65000"/>
+                </a:srgbClr>
+              </a:outerShdw>
+            </a:effectLst>
+          </p:spPr>
+        </p:pic>
+        <p:sp>
+          <p:nvSpPr>
+            <p:cNvPr id="10" name="Rechteck 9">
+              <a:extLst>
+                <a:ext uri="{FF2B5EF4-FFF2-40B4-BE49-F238E27FC236}">
+                  <a16:creationId xmlns:a16="http://schemas.microsoft.com/office/drawing/2014/main" id="{1ED2D7D5-7874-4F0E-AFD9-95B42561AEE9}"/>
+                </a:ext>
+              </a:extLst>
+            </p:cNvPr>
+            <p:cNvSpPr/>
+            <p:nvPr/>
+          </p:nvSpPr>
+          <p:spPr>
+            <a:xfrm>
+              <a:off x="9808704" y="5637467"/>
+              <a:ext cx="1383551" cy="585216"/>
+            </a:xfrm>
+            <a:prstGeom prst="rect">
+              <a:avLst/>
+            </a:prstGeom>
+            <a:ln w="28575">
+              <a:solidFill>
+                <a:schemeClr val="tx1"/>
+              </a:solidFill>
+            </a:ln>
+          </p:spPr>
+          <p:style>
+            <a:lnRef idx="2">
+              <a:schemeClr val="dk1"/>
+            </a:lnRef>
+            <a:fillRef idx="1">
+              <a:schemeClr val="lt1"/>
+            </a:fillRef>
+            <a:effectRef idx="0">
+              <a:schemeClr val="dk1"/>
+            </a:effectRef>
+            <a:fontRef idx="minor">
+              <a:schemeClr val="dk1"/>
+            </a:fontRef>
+          </p:style>
+          <p:txBody>
+            <a:bodyPr rtlCol="0" anchor="ctr"/>
+            <a:lstStyle/>
+            <a:p>
+              <a:pPr algn="ctr"/>
+              <a:r>
+                <a:rPr lang="en-US" dirty="0"/>
+                <a:t>Winner </a:t>
+              </a:r>
+              <a:r>
+                <a:rPr lang="en-GB" dirty="0"/>
+                <a:t>🎉</a:t>
+              </a:r>
+              <a:endParaRPr lang="de-DE" dirty="0"/>
+            </a:p>
+          </p:txBody>
+        </p:sp>
+        <p:cxnSp>
+          <p:nvCxnSpPr>
+            <p:cNvPr id="11" name="Gerade Verbindung mit Pfeil 10">
+              <a:extLst>
+                <a:ext uri="{FF2B5EF4-FFF2-40B4-BE49-F238E27FC236}">
+                  <a16:creationId xmlns:a16="http://schemas.microsoft.com/office/drawing/2014/main" id="{8CEA4226-50D0-622A-3F81-975AE5FBD77C}"/>
+                </a:ext>
+              </a:extLst>
+            </p:cNvPr>
+            <p:cNvCxnSpPr>
+              <a:cxnSpLocks/>
+              <a:stCxn id="10" idx="1"/>
+              <a:endCxn id="7" idx="3"/>
+            </p:cNvCxnSpPr>
+            <p:nvPr/>
+          </p:nvCxnSpPr>
+          <p:spPr>
+            <a:xfrm flipH="1" flipV="1">
+              <a:off x="8695944" y="5627498"/>
+              <a:ext cx="1112760" cy="302577"/>
+            </a:xfrm>
+            <a:prstGeom prst="straightConnector1">
+              <a:avLst/>
+            </a:prstGeom>
+            <a:ln>
+              <a:headEnd type="none" w="med" len="med"/>
+              <a:tailEnd type="arrow" w="med" len="med"/>
+            </a:ln>
+          </p:spPr>
+          <p:style>
+            <a:lnRef idx="3">
+              <a:schemeClr val="dk1"/>
+            </a:lnRef>
+            <a:fillRef idx="0">
+              <a:schemeClr val="dk1"/>
+            </a:fillRef>
+            <a:effectRef idx="2">
+              <a:schemeClr val="dk1"/>
+            </a:effectRef>
+            <a:fontRef idx="minor">
               <a:schemeClr val="tx1"/>
-            </a:solidFill>
-          </a:ln>
-        </p:spPr>
-        <p:style>
-          <a:lnRef idx="2">
-            <a:schemeClr val="dk1"/>
-          </a:lnRef>
-          <a:fillRef idx="1">
-            <a:schemeClr val="lt1"/>
-          </a:fillRef>
-          <a:effectRef idx="0">
-            <a:schemeClr val="dk1"/>
-          </a:effectRef>
-          <a:fontRef idx="minor">
-            <a:schemeClr val="dk1"/>
-          </a:fontRef>
-        </p:style>
-        <p:txBody>
-          <a:bodyPr rtlCol="0" anchor="ctr"/>
-          <a:lstStyle/>
-          <a:p>
-            <a:pPr algn="ctr"/>
-            <a:r>
-              <a:rPr lang="en-US" dirty="0"/>
-              <a:t>Winner </a:t>
-            </a:r>
-            <a:r>
-              <a:rPr lang="en-GB" dirty="0"/>
-              <a:t>🎉</a:t>
-            </a:r>
-            <a:endParaRPr lang="de-DE" dirty="0"/>
-          </a:p>
-        </p:txBody>
-      </p:sp>
-      <p:cxnSp>
-        <p:nvCxnSpPr>
-          <p:cNvPr id="11" name="Gerade Verbindung mit Pfeil 10">
-            <a:extLst>
-              <a:ext uri="{FF2B5EF4-FFF2-40B4-BE49-F238E27FC236}">
-                <a16:creationId xmlns:a16="http://schemas.microsoft.com/office/drawing/2014/main" id="{8CEA4226-50D0-622A-3F81-975AE5FBD77C}"/>
-              </a:ext>
-            </a:extLst>
-          </p:cNvPr>
-          <p:cNvCxnSpPr>
-            <a:cxnSpLocks/>
-            <a:stCxn id="10" idx="1"/>
-            <a:endCxn id="7" idx="3"/>
-          </p:cNvCxnSpPr>
-          <p:nvPr/>
-        </p:nvCxnSpPr>
-        <p:spPr>
-          <a:xfrm flipH="1" flipV="1">
-            <a:off x="8695944" y="5627498"/>
-            <a:ext cx="1112760" cy="302577"/>
-          </a:xfrm>
-          <a:prstGeom prst="straightConnector1">
-            <a:avLst/>
-          </a:prstGeom>
-          <a:ln>
-            <a:headEnd type="none" w="med" len="med"/>
-            <a:tailEnd type="arrow" w="med" len="med"/>
-          </a:ln>
-        </p:spPr>
-        <p:style>
-          <a:lnRef idx="3">
-            <a:schemeClr val="dk1"/>
-          </a:lnRef>
-          <a:fillRef idx="0">
-            <a:schemeClr val="dk1"/>
-          </a:fillRef>
-          <a:effectRef idx="2">
-            <a:schemeClr val="dk1"/>
-          </a:effectRef>
-          <a:fontRef idx="minor">
-            <a:schemeClr val="tx1"/>
-          </a:fontRef>
-        </p:style>
-      </p:cxnSp>
+            </a:fontRef>
+          </p:style>
+        </p:cxnSp>
+      </p:grpSp>
     </p:spTree>
     <p:extLst>
       <p:ext uri="{BB962C8B-B14F-4D97-AF65-F5344CB8AC3E}">
@@ -10493,6 +10530,267 @@
   <p:clrMapOvr>
     <a:masterClrMapping/>
   </p:clrMapOvr>
+  <p:timing>
+    <p:tnLst>
+      <p:par>
+        <p:cTn id="1" dur="indefinite" restart="never" nodeType="tmRoot">
+          <p:childTnLst>
+            <p:seq concurrent="1" nextAc="seek">
+              <p:cTn id="2" dur="indefinite" nodeType="mainSeq">
+                <p:childTnLst>
+                  <p:par>
+                    <p:cTn id="3" fill="hold">
+                      <p:stCondLst>
+                        <p:cond delay="indefinite"/>
+                      </p:stCondLst>
+                      <p:childTnLst>
+                        <p:par>
+                          <p:cTn id="4" fill="hold">
+                            <p:stCondLst>
+                              <p:cond delay="0"/>
+                            </p:stCondLst>
+                            <p:childTnLst>
+                              <p:par>
+                                <p:cTn id="5" presetID="1" presetClass="entr" presetSubtype="0" fill="hold" grpId="0" nodeType="clickEffect">
+                                  <p:stCondLst>
+                                    <p:cond delay="0"/>
+                                  </p:stCondLst>
+                                  <p:childTnLst>
+                                    <p:set>
+                                      <p:cBhvr>
+                                        <p:cTn id="6" dur="1" fill="hold">
+                                          <p:stCondLst>
+                                            <p:cond delay="0"/>
+                                          </p:stCondLst>
+                                        </p:cTn>
+                                        <p:tgtEl>
+                                          <p:spTgt spid="3">
+                                            <p:txEl>
+                                              <p:pRg st="0" end="0"/>
+                                            </p:txEl>
+                                          </p:spTgt>
+                                        </p:tgtEl>
+                                        <p:attrNameLst>
+                                          <p:attrName>style.visibility</p:attrName>
+                                        </p:attrNameLst>
+                                      </p:cBhvr>
+                                      <p:to>
+                                        <p:strVal val="visible"/>
+                                      </p:to>
+                                    </p:set>
+                                  </p:childTnLst>
+                                </p:cTn>
+                              </p:par>
+                              <p:par>
+                                <p:cTn id="7" presetID="1" presetClass="entr" presetSubtype="0" fill="hold" nodeType="withEffect">
+                                  <p:stCondLst>
+                                    <p:cond delay="0"/>
+                                  </p:stCondLst>
+                                  <p:childTnLst>
+                                    <p:set>
+                                      <p:cBhvr>
+                                        <p:cTn id="8" dur="1" fill="hold">
+                                          <p:stCondLst>
+                                            <p:cond delay="0"/>
+                                          </p:stCondLst>
+                                        </p:cTn>
+                                        <p:tgtEl>
+                                          <p:spTgt spid="5"/>
+                                        </p:tgtEl>
+                                        <p:attrNameLst>
+                                          <p:attrName>style.visibility</p:attrName>
+                                        </p:attrNameLst>
+                                      </p:cBhvr>
+                                      <p:to>
+                                        <p:strVal val="visible"/>
+                                      </p:to>
+                                    </p:set>
+                                  </p:childTnLst>
+                                </p:cTn>
+                              </p:par>
+                            </p:childTnLst>
+                          </p:cTn>
+                        </p:par>
+                      </p:childTnLst>
+                    </p:cTn>
+                  </p:par>
+                  <p:par>
+                    <p:cTn id="9" fill="hold">
+                      <p:stCondLst>
+                        <p:cond delay="indefinite"/>
+                      </p:stCondLst>
+                      <p:childTnLst>
+                        <p:par>
+                          <p:cTn id="10" fill="hold">
+                            <p:stCondLst>
+                              <p:cond delay="0"/>
+                            </p:stCondLst>
+                            <p:childTnLst>
+                              <p:par>
+                                <p:cTn id="11" presetID="1" presetClass="entr" presetSubtype="0" fill="hold" grpId="0" nodeType="clickEffect">
+                                  <p:stCondLst>
+                                    <p:cond delay="0"/>
+                                  </p:stCondLst>
+                                  <p:childTnLst>
+                                    <p:set>
+                                      <p:cBhvr>
+                                        <p:cTn id="12" dur="1" fill="hold">
+                                          <p:stCondLst>
+                                            <p:cond delay="0"/>
+                                          </p:stCondLst>
+                                        </p:cTn>
+                                        <p:tgtEl>
+                                          <p:spTgt spid="3">
+                                            <p:txEl>
+                                              <p:pRg st="5" end="5"/>
+                                            </p:txEl>
+                                          </p:spTgt>
+                                        </p:tgtEl>
+                                        <p:attrNameLst>
+                                          <p:attrName>style.visibility</p:attrName>
+                                        </p:attrNameLst>
+                                      </p:cBhvr>
+                                      <p:to>
+                                        <p:strVal val="visible"/>
+                                      </p:to>
+                                    </p:set>
+                                  </p:childTnLst>
+                                </p:cTn>
+                              </p:par>
+                              <p:par>
+                                <p:cTn id="13" presetID="1" presetClass="entr" presetSubtype="0" fill="hold" nodeType="withEffect">
+                                  <p:stCondLst>
+                                    <p:cond delay="0"/>
+                                  </p:stCondLst>
+                                  <p:childTnLst>
+                                    <p:set>
+                                      <p:cBhvr>
+                                        <p:cTn id="14" dur="1" fill="hold">
+                                          <p:stCondLst>
+                                            <p:cond delay="0"/>
+                                          </p:stCondLst>
+                                        </p:cTn>
+                                        <p:tgtEl>
+                                          <p:spTgt spid="9"/>
+                                        </p:tgtEl>
+                                        <p:attrNameLst>
+                                          <p:attrName>style.visibility</p:attrName>
+                                        </p:attrNameLst>
+                                      </p:cBhvr>
+                                      <p:to>
+                                        <p:strVal val="visible"/>
+                                      </p:to>
+                                    </p:set>
+                                  </p:childTnLst>
+                                </p:cTn>
+                              </p:par>
+                            </p:childTnLst>
+                          </p:cTn>
+                        </p:par>
+                      </p:childTnLst>
+                    </p:cTn>
+                  </p:par>
+                  <p:par>
+                    <p:cTn id="15" fill="hold">
+                      <p:stCondLst>
+                        <p:cond delay="indefinite"/>
+                      </p:stCondLst>
+                      <p:childTnLst>
+                        <p:par>
+                          <p:cTn id="16" fill="hold">
+                            <p:stCondLst>
+                              <p:cond delay="0"/>
+                            </p:stCondLst>
+                            <p:childTnLst>
+                              <p:par>
+                                <p:cTn id="17" presetID="1" presetClass="entr" presetSubtype="0" fill="hold" grpId="0" nodeType="clickEffect">
+                                  <p:stCondLst>
+                                    <p:cond delay="0"/>
+                                  </p:stCondLst>
+                                  <p:childTnLst>
+                                    <p:set>
+                                      <p:cBhvr>
+                                        <p:cTn id="18" dur="1" fill="hold">
+                                          <p:stCondLst>
+                                            <p:cond delay="0"/>
+                                          </p:stCondLst>
+                                        </p:cTn>
+                                        <p:tgtEl>
+                                          <p:spTgt spid="3">
+                                            <p:txEl>
+                                              <p:pRg st="7" end="7"/>
+                                            </p:txEl>
+                                          </p:spTgt>
+                                        </p:tgtEl>
+                                        <p:attrNameLst>
+                                          <p:attrName>style.visibility</p:attrName>
+                                        </p:attrNameLst>
+                                      </p:cBhvr>
+                                      <p:to>
+                                        <p:strVal val="visible"/>
+                                      </p:to>
+                                    </p:set>
+                                  </p:childTnLst>
+                                </p:cTn>
+                              </p:par>
+                              <p:par>
+                                <p:cTn id="19" presetID="1" presetClass="entr" presetSubtype="0" fill="hold" nodeType="withEffect">
+                                  <p:stCondLst>
+                                    <p:cond delay="0"/>
+                                  </p:stCondLst>
+                                  <p:childTnLst>
+                                    <p:set>
+                                      <p:cBhvr>
+                                        <p:cTn id="20" dur="1" fill="hold">
+                                          <p:stCondLst>
+                                            <p:cond delay="0"/>
+                                          </p:stCondLst>
+                                        </p:cTn>
+                                        <p:tgtEl>
+                                          <p:spTgt spid="4"/>
+                                        </p:tgtEl>
+                                        <p:attrNameLst>
+                                          <p:attrName>style.visibility</p:attrName>
+                                        </p:attrNameLst>
+                                      </p:cBhvr>
+                                      <p:to>
+                                        <p:strVal val="visible"/>
+                                      </p:to>
+                                    </p:set>
+                                  </p:childTnLst>
+                                </p:cTn>
+                              </p:par>
+                            </p:childTnLst>
+                          </p:cTn>
+                        </p:par>
+                      </p:childTnLst>
+                    </p:cTn>
+                  </p:par>
+                </p:childTnLst>
+              </p:cTn>
+              <p:prevCondLst>
+                <p:cond evt="onPrev" delay="0">
+                  <p:tgtEl>
+                    <p:sldTgt/>
+                  </p:tgtEl>
+                </p:cond>
+              </p:prevCondLst>
+              <p:nextCondLst>
+                <p:cond evt="onNext" delay="0">
+                  <p:tgtEl>
+                    <p:sldTgt/>
+                  </p:tgtEl>
+                </p:cond>
+              </p:nextCondLst>
+            </p:seq>
+          </p:childTnLst>
+        </p:cTn>
+      </p:par>
+    </p:tnLst>
+    <p:bldLst>
+      <p:bldP spid="3" grpId="0" uiExpand="1" build="p"/>
+    </p:bldLst>
+  </p:timing>
 </p:sld>
 </file>
 

--- a/Lecture Resources/Lecture Powerpoints/Chunk 6 - Functions.pptx
+++ b/Lecture Resources/Lecture Powerpoints/Chunk 6 - Functions.pptx
@@ -132,6 +132,99 @@
 
 <file path=ppt/changesInfos/changesInfo1.xml><?xml version="1.0" encoding="utf-8"?>
 <pc:chgInfo xmlns:a="http://schemas.openxmlformats.org/drawingml/2006/main" xmlns:r="http://schemas.openxmlformats.org/officeDocument/2006/relationships" xmlns:ac="http://schemas.microsoft.com/office/drawing/2013/main/command" xmlns:pc="http://schemas.microsoft.com/office/powerpoint/2013/main/command">
+  <pc:docChgLst>
+    <pc:chgData name="Jonathan Bollig" userId="8b5d0afe-f106-45e0-8c3f-fd98fa124db1" providerId="ADAL" clId="{891409C9-2319-433B-8001-2E1CE368518E}"/>
+    <pc:docChg chg="custSel addSld delSld modSld">
+      <pc:chgData name="Jonathan Bollig" userId="8b5d0afe-f106-45e0-8c3f-fd98fa124db1" providerId="ADAL" clId="{891409C9-2319-433B-8001-2E1CE368518E}" dt="2025-08-18T13:33:56.347" v="46" actId="47"/>
+      <pc:docMkLst>
+        <pc:docMk/>
+      </pc:docMkLst>
+      <pc:sldChg chg="modSp mod">
+        <pc:chgData name="Jonathan Bollig" userId="8b5d0afe-f106-45e0-8c3f-fd98fa124db1" providerId="ADAL" clId="{891409C9-2319-433B-8001-2E1CE368518E}" dt="2025-08-18T10:03:07.320" v="7" actId="20577"/>
+        <pc:sldMkLst>
+          <pc:docMk/>
+          <pc:sldMk cId="836289018" sldId="256"/>
+        </pc:sldMkLst>
+      </pc:sldChg>
+      <pc:sldChg chg="del">
+        <pc:chgData name="Jonathan Bollig" userId="8b5d0afe-f106-45e0-8c3f-fd98fa124db1" providerId="ADAL" clId="{891409C9-2319-433B-8001-2E1CE368518E}" dt="2025-08-18T09:57:07.527" v="0" actId="47"/>
+        <pc:sldMkLst>
+          <pc:docMk/>
+          <pc:sldMk cId="3656329933" sldId="257"/>
+        </pc:sldMkLst>
+      </pc:sldChg>
+      <pc:sldChg chg="del">
+        <pc:chgData name="Jonathan Bollig" userId="8b5d0afe-f106-45e0-8c3f-fd98fa124db1" providerId="ADAL" clId="{891409C9-2319-433B-8001-2E1CE368518E}" dt="2025-08-18T09:57:07.527" v="0" actId="47"/>
+        <pc:sldMkLst>
+          <pc:docMk/>
+          <pc:sldMk cId="544279955" sldId="258"/>
+        </pc:sldMkLst>
+      </pc:sldChg>
+      <pc:sldChg chg="delSp modSp del mod">
+        <pc:chgData name="Jonathan Bollig" userId="8b5d0afe-f106-45e0-8c3f-fd98fa124db1" providerId="ADAL" clId="{891409C9-2319-433B-8001-2E1CE368518E}" dt="2025-08-18T13:33:56.347" v="46" actId="47"/>
+        <pc:sldMkLst>
+          <pc:docMk/>
+          <pc:sldMk cId="2169503629" sldId="259"/>
+        </pc:sldMkLst>
+      </pc:sldChg>
+      <pc:sldChg chg="add">
+        <pc:chgData name="Jonathan Bollig" userId="8b5d0afe-f106-45e0-8c3f-fd98fa124db1" providerId="ADAL" clId="{891409C9-2319-433B-8001-2E1CE368518E}" dt="2025-08-18T13:33:54.473" v="45"/>
+        <pc:sldMkLst>
+          <pc:docMk/>
+          <pc:sldMk cId="932306145" sldId="260"/>
+        </pc:sldMkLst>
+      </pc:sldChg>
+      <pc:sldChg chg="del">
+        <pc:chgData name="Jonathan Bollig" userId="8b5d0afe-f106-45e0-8c3f-fd98fa124db1" providerId="ADAL" clId="{891409C9-2319-433B-8001-2E1CE368518E}" dt="2025-08-18T09:57:07.527" v="0" actId="47"/>
+        <pc:sldMkLst>
+          <pc:docMk/>
+          <pc:sldMk cId="2533283895" sldId="260"/>
+        </pc:sldMkLst>
+      </pc:sldChg>
+      <pc:sldChg chg="del">
+        <pc:chgData name="Jonathan Bollig" userId="8b5d0afe-f106-45e0-8c3f-fd98fa124db1" providerId="ADAL" clId="{891409C9-2319-433B-8001-2E1CE368518E}" dt="2025-08-18T09:57:07.527" v="0" actId="47"/>
+        <pc:sldMkLst>
+          <pc:docMk/>
+          <pc:sldMk cId="847849653" sldId="261"/>
+        </pc:sldMkLst>
+      </pc:sldChg>
+      <pc:sldChg chg="del">
+        <pc:chgData name="Jonathan Bollig" userId="8b5d0afe-f106-45e0-8c3f-fd98fa124db1" providerId="ADAL" clId="{891409C9-2319-433B-8001-2E1CE368518E}" dt="2025-08-18T09:57:07.527" v="0" actId="47"/>
+        <pc:sldMkLst>
+          <pc:docMk/>
+          <pc:sldMk cId="1908144578" sldId="262"/>
+        </pc:sldMkLst>
+      </pc:sldChg>
+      <pc:sldChg chg="del">
+        <pc:chgData name="Jonathan Bollig" userId="8b5d0afe-f106-45e0-8c3f-fd98fa124db1" providerId="ADAL" clId="{891409C9-2319-433B-8001-2E1CE368518E}" dt="2025-08-18T09:57:07.527" v="0" actId="47"/>
+        <pc:sldMkLst>
+          <pc:docMk/>
+          <pc:sldMk cId="4076698392" sldId="263"/>
+        </pc:sldMkLst>
+      </pc:sldChg>
+      <pc:sldChg chg="del">
+        <pc:chgData name="Jonathan Bollig" userId="8b5d0afe-f106-45e0-8c3f-fd98fa124db1" providerId="ADAL" clId="{891409C9-2319-433B-8001-2E1CE368518E}" dt="2025-08-18T09:57:07.527" v="0" actId="47"/>
+        <pc:sldMkLst>
+          <pc:docMk/>
+          <pc:sldMk cId="3708449378" sldId="264"/>
+        </pc:sldMkLst>
+      </pc:sldChg>
+      <pc:sldChg chg="del">
+        <pc:chgData name="Jonathan Bollig" userId="8b5d0afe-f106-45e0-8c3f-fd98fa124db1" providerId="ADAL" clId="{891409C9-2319-433B-8001-2E1CE368518E}" dt="2025-08-18T09:57:07.527" v="0" actId="47"/>
+        <pc:sldMkLst>
+          <pc:docMk/>
+          <pc:sldMk cId="933916611" sldId="265"/>
+        </pc:sldMkLst>
+      </pc:sldChg>
+      <pc:sldChg chg="del">
+        <pc:chgData name="Jonathan Bollig" userId="8b5d0afe-f106-45e0-8c3f-fd98fa124db1" providerId="ADAL" clId="{891409C9-2319-433B-8001-2E1CE368518E}" dt="2025-08-18T09:57:07.527" v="0" actId="47"/>
+        <pc:sldMkLst>
+          <pc:docMk/>
+          <pc:sldMk cId="2117799034" sldId="266"/>
+        </pc:sldMkLst>
+      </pc:sldChg>
+    </pc:docChg>
+  </pc:docChgLst>
   <pc:docChgLst>
     <pc:chgData name="Jonathan Bollig" userId="8b5d0afe-f106-45e0-8c3f-fd98fa124db1" providerId="ADAL" clId="{B108959E-8160-4214-BA0D-42D2F1070C03}"/>
     <pc:docChg chg="undo custSel addSld modSld sldOrd">
@@ -1094,99 +1187,6 @@
       </pc:sldChg>
     </pc:docChg>
   </pc:docChgLst>
-  <pc:docChgLst>
-    <pc:chgData name="Jonathan Bollig" userId="8b5d0afe-f106-45e0-8c3f-fd98fa124db1" providerId="ADAL" clId="{891409C9-2319-433B-8001-2E1CE368518E}"/>
-    <pc:docChg chg="custSel addSld delSld modSld">
-      <pc:chgData name="Jonathan Bollig" userId="8b5d0afe-f106-45e0-8c3f-fd98fa124db1" providerId="ADAL" clId="{891409C9-2319-433B-8001-2E1CE368518E}" dt="2025-08-18T13:33:56.347" v="46" actId="47"/>
-      <pc:docMkLst>
-        <pc:docMk/>
-      </pc:docMkLst>
-      <pc:sldChg chg="modSp mod">
-        <pc:chgData name="Jonathan Bollig" userId="8b5d0afe-f106-45e0-8c3f-fd98fa124db1" providerId="ADAL" clId="{891409C9-2319-433B-8001-2E1CE368518E}" dt="2025-08-18T10:03:07.320" v="7" actId="20577"/>
-        <pc:sldMkLst>
-          <pc:docMk/>
-          <pc:sldMk cId="836289018" sldId="256"/>
-        </pc:sldMkLst>
-      </pc:sldChg>
-      <pc:sldChg chg="del">
-        <pc:chgData name="Jonathan Bollig" userId="8b5d0afe-f106-45e0-8c3f-fd98fa124db1" providerId="ADAL" clId="{891409C9-2319-433B-8001-2E1CE368518E}" dt="2025-08-18T09:57:07.527" v="0" actId="47"/>
-        <pc:sldMkLst>
-          <pc:docMk/>
-          <pc:sldMk cId="3656329933" sldId="257"/>
-        </pc:sldMkLst>
-      </pc:sldChg>
-      <pc:sldChg chg="del">
-        <pc:chgData name="Jonathan Bollig" userId="8b5d0afe-f106-45e0-8c3f-fd98fa124db1" providerId="ADAL" clId="{891409C9-2319-433B-8001-2E1CE368518E}" dt="2025-08-18T09:57:07.527" v="0" actId="47"/>
-        <pc:sldMkLst>
-          <pc:docMk/>
-          <pc:sldMk cId="544279955" sldId="258"/>
-        </pc:sldMkLst>
-      </pc:sldChg>
-      <pc:sldChg chg="delSp modSp del mod">
-        <pc:chgData name="Jonathan Bollig" userId="8b5d0afe-f106-45e0-8c3f-fd98fa124db1" providerId="ADAL" clId="{891409C9-2319-433B-8001-2E1CE368518E}" dt="2025-08-18T13:33:56.347" v="46" actId="47"/>
-        <pc:sldMkLst>
-          <pc:docMk/>
-          <pc:sldMk cId="2169503629" sldId="259"/>
-        </pc:sldMkLst>
-      </pc:sldChg>
-      <pc:sldChg chg="add">
-        <pc:chgData name="Jonathan Bollig" userId="8b5d0afe-f106-45e0-8c3f-fd98fa124db1" providerId="ADAL" clId="{891409C9-2319-433B-8001-2E1CE368518E}" dt="2025-08-18T13:33:54.473" v="45"/>
-        <pc:sldMkLst>
-          <pc:docMk/>
-          <pc:sldMk cId="932306145" sldId="260"/>
-        </pc:sldMkLst>
-      </pc:sldChg>
-      <pc:sldChg chg="del">
-        <pc:chgData name="Jonathan Bollig" userId="8b5d0afe-f106-45e0-8c3f-fd98fa124db1" providerId="ADAL" clId="{891409C9-2319-433B-8001-2E1CE368518E}" dt="2025-08-18T09:57:07.527" v="0" actId="47"/>
-        <pc:sldMkLst>
-          <pc:docMk/>
-          <pc:sldMk cId="2533283895" sldId="260"/>
-        </pc:sldMkLst>
-      </pc:sldChg>
-      <pc:sldChg chg="del">
-        <pc:chgData name="Jonathan Bollig" userId="8b5d0afe-f106-45e0-8c3f-fd98fa124db1" providerId="ADAL" clId="{891409C9-2319-433B-8001-2E1CE368518E}" dt="2025-08-18T09:57:07.527" v="0" actId="47"/>
-        <pc:sldMkLst>
-          <pc:docMk/>
-          <pc:sldMk cId="847849653" sldId="261"/>
-        </pc:sldMkLst>
-      </pc:sldChg>
-      <pc:sldChg chg="del">
-        <pc:chgData name="Jonathan Bollig" userId="8b5d0afe-f106-45e0-8c3f-fd98fa124db1" providerId="ADAL" clId="{891409C9-2319-433B-8001-2E1CE368518E}" dt="2025-08-18T09:57:07.527" v="0" actId="47"/>
-        <pc:sldMkLst>
-          <pc:docMk/>
-          <pc:sldMk cId="1908144578" sldId="262"/>
-        </pc:sldMkLst>
-      </pc:sldChg>
-      <pc:sldChg chg="del">
-        <pc:chgData name="Jonathan Bollig" userId="8b5d0afe-f106-45e0-8c3f-fd98fa124db1" providerId="ADAL" clId="{891409C9-2319-433B-8001-2E1CE368518E}" dt="2025-08-18T09:57:07.527" v="0" actId="47"/>
-        <pc:sldMkLst>
-          <pc:docMk/>
-          <pc:sldMk cId="4076698392" sldId="263"/>
-        </pc:sldMkLst>
-      </pc:sldChg>
-      <pc:sldChg chg="del">
-        <pc:chgData name="Jonathan Bollig" userId="8b5d0afe-f106-45e0-8c3f-fd98fa124db1" providerId="ADAL" clId="{891409C9-2319-433B-8001-2E1CE368518E}" dt="2025-08-18T09:57:07.527" v="0" actId="47"/>
-        <pc:sldMkLst>
-          <pc:docMk/>
-          <pc:sldMk cId="3708449378" sldId="264"/>
-        </pc:sldMkLst>
-      </pc:sldChg>
-      <pc:sldChg chg="del">
-        <pc:chgData name="Jonathan Bollig" userId="8b5d0afe-f106-45e0-8c3f-fd98fa124db1" providerId="ADAL" clId="{891409C9-2319-433B-8001-2E1CE368518E}" dt="2025-08-18T09:57:07.527" v="0" actId="47"/>
-        <pc:sldMkLst>
-          <pc:docMk/>
-          <pc:sldMk cId="933916611" sldId="265"/>
-        </pc:sldMkLst>
-      </pc:sldChg>
-      <pc:sldChg chg="del">
-        <pc:chgData name="Jonathan Bollig" userId="8b5d0afe-f106-45e0-8c3f-fd98fa124db1" providerId="ADAL" clId="{891409C9-2319-433B-8001-2E1CE368518E}" dt="2025-08-18T09:57:07.527" v="0" actId="47"/>
-        <pc:sldMkLst>
-          <pc:docMk/>
-          <pc:sldMk cId="2117799034" sldId="266"/>
-        </pc:sldMkLst>
-      </pc:sldChg>
-    </pc:docChg>
-  </pc:docChgLst>
 </pc:chgInfo>
 </file>
 
@@ -1565,7 +1565,7 @@
           <a:p>
             <a:fld id="{11422C3B-6429-4381-8F08-B422F3CD22BF}" type="slidenum">
               <a:rPr lang="de-DE" smtClean="0"/>
-              <a:t>‹Nr.›</a:t>
+              <a:t>‹#›</a:t>
             </a:fld>
             <a:endParaRPr lang="de-DE"/>
           </a:p>
@@ -2442,7 +2442,7 @@
           <a:p>
             <a:fld id="{C018A060-D51C-4243-8F88-61D66D5570B8}" type="slidenum">
               <a:rPr lang="de-DE" smtClean="0"/>
-              <a:t>‹Nr.›</a:t>
+              <a:t>‹#›</a:t>
             </a:fld>
             <a:endParaRPr lang="de-DE"/>
           </a:p>
@@ -2640,7 +2640,7 @@
           <a:p>
             <a:fld id="{C018A060-D51C-4243-8F88-61D66D5570B8}" type="slidenum">
               <a:rPr lang="de-DE" smtClean="0"/>
-              <a:t>‹Nr.›</a:t>
+              <a:t>‹#›</a:t>
             </a:fld>
             <a:endParaRPr lang="de-DE"/>
           </a:p>
@@ -2848,7 +2848,7 @@
           <a:p>
             <a:fld id="{C018A060-D51C-4243-8F88-61D66D5570B8}" type="slidenum">
               <a:rPr lang="de-DE" smtClean="0"/>
-              <a:t>‹Nr.›</a:t>
+              <a:t>‹#›</a:t>
             </a:fld>
             <a:endParaRPr lang="de-DE"/>
           </a:p>
@@ -3046,7 +3046,7 @@
           <a:p>
             <a:fld id="{C018A060-D51C-4243-8F88-61D66D5570B8}" type="slidenum">
               <a:rPr lang="de-DE" smtClean="0"/>
-              <a:t>‹Nr.›</a:t>
+              <a:t>‹#›</a:t>
             </a:fld>
             <a:endParaRPr lang="de-DE"/>
           </a:p>
@@ -3321,7 +3321,7 @@
           <a:p>
             <a:fld id="{C018A060-D51C-4243-8F88-61D66D5570B8}" type="slidenum">
               <a:rPr lang="de-DE" smtClean="0"/>
-              <a:t>‹Nr.›</a:t>
+              <a:t>‹#›</a:t>
             </a:fld>
             <a:endParaRPr lang="de-DE"/>
           </a:p>
@@ -3586,7 +3586,7 @@
           <a:p>
             <a:fld id="{C018A060-D51C-4243-8F88-61D66D5570B8}" type="slidenum">
               <a:rPr lang="de-DE" smtClean="0"/>
-              <a:t>‹Nr.›</a:t>
+              <a:t>‹#›</a:t>
             </a:fld>
             <a:endParaRPr lang="de-DE"/>
           </a:p>
@@ -3998,7 +3998,7 @@
           <a:p>
             <a:fld id="{C018A060-D51C-4243-8F88-61D66D5570B8}" type="slidenum">
               <a:rPr lang="de-DE" smtClean="0"/>
-              <a:t>‹Nr.›</a:t>
+              <a:t>‹#›</a:t>
             </a:fld>
             <a:endParaRPr lang="de-DE"/>
           </a:p>
@@ -4139,7 +4139,7 @@
           <a:p>
             <a:fld id="{C018A060-D51C-4243-8F88-61D66D5570B8}" type="slidenum">
               <a:rPr lang="de-DE" smtClean="0"/>
-              <a:t>‹Nr.›</a:t>
+              <a:t>‹#›</a:t>
             </a:fld>
             <a:endParaRPr lang="de-DE"/>
           </a:p>
@@ -4252,7 +4252,7 @@
           <a:p>
             <a:fld id="{C018A060-D51C-4243-8F88-61D66D5570B8}" type="slidenum">
               <a:rPr lang="de-DE" smtClean="0"/>
-              <a:t>‹Nr.›</a:t>
+              <a:t>‹#›</a:t>
             </a:fld>
             <a:endParaRPr lang="de-DE"/>
           </a:p>
@@ -4563,7 +4563,7 @@
           <a:p>
             <a:fld id="{C018A060-D51C-4243-8F88-61D66D5570B8}" type="slidenum">
               <a:rPr lang="de-DE" smtClean="0"/>
-              <a:t>‹Nr.›</a:t>
+              <a:t>‹#›</a:t>
             </a:fld>
             <a:endParaRPr lang="de-DE"/>
           </a:p>
@@ -4851,7 +4851,7 @@
           <a:p>
             <a:fld id="{C018A060-D51C-4243-8F88-61D66D5570B8}" type="slidenum">
               <a:rPr lang="de-DE" smtClean="0"/>
-              <a:t>‹Nr.›</a:t>
+              <a:t>‹#›</a:t>
             </a:fld>
             <a:endParaRPr lang="de-DE"/>
           </a:p>
@@ -5128,7 +5128,7 @@
           <a:p>
             <a:fld id="{C018A060-D51C-4243-8F88-61D66D5570B8}" type="slidenum">
               <a:rPr lang="de-DE" smtClean="0"/>
-              <a:t>‹Nr.›</a:t>
+              <a:t>‹#›</a:t>
             </a:fld>
             <a:endParaRPr lang="de-DE"/>
           </a:p>
@@ -5473,8 +5473,8 @@
         </p:nvSpPr>
         <p:spPr>
           <a:xfrm>
-            <a:off x="1458468" y="1122363"/>
-            <a:ext cx="9294876" cy="2387600"/>
+            <a:off x="377040" y="1886293"/>
+            <a:ext cx="11437919" cy="2387600"/>
           </a:xfrm>
         </p:spPr>
         <p:txBody>
@@ -5495,15 +5495,14 @@
               <a:t>(And everyone else!)</a:t>
             </a:r>
             <a:br>
+              <a:rPr lang="en-US" dirty="0"/>
+            </a:br>
+            <a:br>
               <a:rPr lang="en-US" noProof="0" dirty="0"/>
             </a:br>
             <a:r>
-              <a:rPr lang="en-US" noProof="0"/>
-              <a:t>Chunk 6: </a:t>
-            </a:r>
-            <a:r>
-              <a:rPr lang="en-US" noProof="0" dirty="0"/>
-              <a:t>Functions: Saving Code</a:t>
+              <a:rPr lang="en-US" b="1" noProof="0" dirty="0"/>
+              <a:t>Chunk 6: Functions: Saving Code</a:t>
             </a:r>
           </a:p>
         </p:txBody>
@@ -5524,7 +5523,12 @@
             <p:ph type="subTitle" idx="1"/>
           </p:nvPr>
         </p:nvSpPr>
-        <p:spPr/>
+        <p:spPr>
+          <a:xfrm>
+            <a:off x="1524000" y="5118323"/>
+            <a:ext cx="9144000" cy="1655762"/>
+          </a:xfrm>
+        </p:spPr>
         <p:txBody>
           <a:bodyPr/>
           <a:lstStyle/>
@@ -5536,10 +5540,9 @@
           </a:p>
           <a:p>
             <a:r>
-              <a:rPr lang="en-US" noProof="0"/>
+              <a:rPr lang="en-US" noProof="0" dirty="0"/>
               <a:t>09.10.2025</a:t>
             </a:r>
-            <a:endParaRPr lang="en-US" noProof="0" dirty="0"/>
           </a:p>
         </p:txBody>
       </p:sp>
@@ -5618,7 +5621,12 @@
             <p:ph idx="1"/>
           </p:nvPr>
         </p:nvSpPr>
-        <p:spPr/>
+        <p:spPr>
+          <a:xfrm>
+            <a:off x="838200" y="1825625"/>
+            <a:ext cx="5076463" cy="4351338"/>
+          </a:xfrm>
+        </p:spPr>
         <p:txBody>
           <a:bodyPr/>
           <a:lstStyle/>
@@ -5680,7 +5688,7 @@
         </p:blipFill>
         <p:spPr>
           <a:xfrm>
-            <a:off x="1200661" y="2310245"/>
+            <a:off x="6645005" y="1583666"/>
             <a:ext cx="2584369" cy="1429651"/>
           </a:xfrm>
           <a:prstGeom prst="rect">
@@ -5720,7 +5728,7 @@
         </p:blipFill>
         <p:spPr>
           <a:xfrm>
-            <a:off x="4469753" y="3851973"/>
+            <a:off x="5444618" y="3815116"/>
             <a:ext cx="4985143" cy="937105"/>
           </a:xfrm>
           <a:prstGeom prst="rect">
@@ -5752,7 +5760,7 @@
         </p:nvSpPr>
         <p:spPr>
           <a:xfrm>
-            <a:off x="6645005" y="4638700"/>
+            <a:off x="7619870" y="4601843"/>
             <a:ext cx="554960" cy="923330"/>
           </a:xfrm>
           <a:prstGeom prst="rect">
@@ -5796,7 +5804,7 @@
         </p:blipFill>
         <p:spPr>
           <a:xfrm>
-            <a:off x="4469753" y="5396882"/>
+            <a:off x="5444618" y="5360025"/>
             <a:ext cx="4985142" cy="951875"/>
           </a:xfrm>
           <a:prstGeom prst="rect">
@@ -5824,6 +5832,169 @@
   <p:clrMapOvr>
     <a:masterClrMapping/>
   </p:clrMapOvr>
+  <p:timing>
+    <p:tnLst>
+      <p:par>
+        <p:cTn id="1" dur="indefinite" restart="never" nodeType="tmRoot">
+          <p:childTnLst>
+            <p:seq concurrent="1" nextAc="seek">
+              <p:cTn id="2" dur="indefinite" nodeType="mainSeq">
+                <p:childTnLst>
+                  <p:par>
+                    <p:cTn id="3" fill="hold">
+                      <p:stCondLst>
+                        <p:cond delay="indefinite"/>
+                      </p:stCondLst>
+                      <p:childTnLst>
+                        <p:par>
+                          <p:cTn id="4" fill="hold">
+                            <p:stCondLst>
+                              <p:cond delay="0"/>
+                            </p:stCondLst>
+                            <p:childTnLst>
+                              <p:par>
+                                <p:cTn id="5" presetID="1" presetClass="entr" presetSubtype="0" fill="hold" nodeType="clickEffect">
+                                  <p:stCondLst>
+                                    <p:cond delay="0"/>
+                                  </p:stCondLst>
+                                  <p:childTnLst>
+                                    <p:set>
+                                      <p:cBhvr>
+                                        <p:cTn id="6" dur="1" fill="hold">
+                                          <p:stCondLst>
+                                            <p:cond delay="0"/>
+                                          </p:stCondLst>
+                                        </p:cTn>
+                                        <p:tgtEl>
+                                          <p:spTgt spid="3">
+                                            <p:txEl>
+                                              <p:pRg st="4" end="4"/>
+                                            </p:txEl>
+                                          </p:spTgt>
+                                        </p:tgtEl>
+                                        <p:attrNameLst>
+                                          <p:attrName>style.visibility</p:attrName>
+                                        </p:attrNameLst>
+                                      </p:cBhvr>
+                                      <p:to>
+                                        <p:strVal val="visible"/>
+                                      </p:to>
+                                    </p:set>
+                                  </p:childTnLst>
+                                </p:cTn>
+                              </p:par>
+                              <p:par>
+                                <p:cTn id="7" presetID="1" presetClass="entr" presetSubtype="0" fill="hold" nodeType="withEffect">
+                                  <p:stCondLst>
+                                    <p:cond delay="0"/>
+                                  </p:stCondLst>
+                                  <p:childTnLst>
+                                    <p:set>
+                                      <p:cBhvr>
+                                        <p:cTn id="8" dur="1" fill="hold">
+                                          <p:stCondLst>
+                                            <p:cond delay="0"/>
+                                          </p:stCondLst>
+                                        </p:cTn>
+                                        <p:tgtEl>
+                                          <p:spTgt spid="7"/>
+                                        </p:tgtEl>
+                                        <p:attrNameLst>
+                                          <p:attrName>style.visibility</p:attrName>
+                                        </p:attrNameLst>
+                                      </p:cBhvr>
+                                      <p:to>
+                                        <p:strVal val="visible"/>
+                                      </p:to>
+                                    </p:set>
+                                  </p:childTnLst>
+                                </p:cTn>
+                              </p:par>
+                              <p:par>
+                                <p:cTn id="9" presetID="1" presetClass="entr" presetSubtype="0" fill="hold" grpId="0" nodeType="withEffect">
+                                  <p:stCondLst>
+                                    <p:cond delay="0"/>
+                                  </p:stCondLst>
+                                  <p:childTnLst>
+                                    <p:set>
+                                      <p:cBhvr>
+                                        <p:cTn id="10" dur="1" fill="hold">
+                                          <p:stCondLst>
+                                            <p:cond delay="0"/>
+                                          </p:stCondLst>
+                                        </p:cTn>
+                                        <p:tgtEl>
+                                          <p:spTgt spid="8"/>
+                                        </p:tgtEl>
+                                        <p:attrNameLst>
+                                          <p:attrName>style.visibility</p:attrName>
+                                        </p:attrNameLst>
+                                      </p:cBhvr>
+                                      <p:to>
+                                        <p:strVal val="visible"/>
+                                      </p:to>
+                                    </p:set>
+                                  </p:childTnLst>
+                                </p:cTn>
+                              </p:par>
+                              <p:par>
+                                <p:cTn id="11" presetID="1" presetClass="entr" presetSubtype="0" fill="hold" nodeType="withEffect">
+                                  <p:stCondLst>
+                                    <p:cond delay="0"/>
+                                  </p:stCondLst>
+                                  <p:childTnLst>
+                                    <p:set>
+                                      <p:cBhvr>
+                                        <p:cTn id="12" dur="1" fill="hold">
+                                          <p:stCondLst>
+                                            <p:cond delay="0"/>
+                                          </p:stCondLst>
+                                        </p:cTn>
+                                        <p:tgtEl>
+                                          <p:spTgt spid="10"/>
+                                        </p:tgtEl>
+                                        <p:attrNameLst>
+                                          <p:attrName>style.visibility</p:attrName>
+                                        </p:attrNameLst>
+                                      </p:cBhvr>
+                                      <p:to>
+                                        <p:strVal val="visible"/>
+                                      </p:to>
+                                    </p:set>
+                                  </p:childTnLst>
+                                </p:cTn>
+                              </p:par>
+                            </p:childTnLst>
+                          </p:cTn>
+                        </p:par>
+                      </p:childTnLst>
+                    </p:cTn>
+                  </p:par>
+                </p:childTnLst>
+              </p:cTn>
+              <p:prevCondLst>
+                <p:cond evt="onPrev" delay="0">
+                  <p:tgtEl>
+                    <p:sldTgt/>
+                  </p:tgtEl>
+                </p:cond>
+              </p:prevCondLst>
+              <p:nextCondLst>
+                <p:cond evt="onNext" delay="0">
+                  <p:tgtEl>
+                    <p:sldTgt/>
+                  </p:tgtEl>
+                </p:cond>
+              </p:nextCondLst>
+            </p:seq>
+          </p:childTnLst>
+        </p:cTn>
+      </p:par>
+    </p:tnLst>
+    <p:bldLst>
+      <p:bldP spid="8" grpId="0"/>
+    </p:bldLst>
+  </p:timing>
 </p:sld>
 </file>
 
@@ -7835,12 +8006,42 @@
           </a:p>
         </p:txBody>
       </p:sp>
+      <p:pic>
+        <p:nvPicPr>
+          <p:cNvPr id="5" name="Grafik 4">
+            <a:extLst>
+              <a:ext uri="{FF2B5EF4-FFF2-40B4-BE49-F238E27FC236}">
+                <a16:creationId xmlns:a16="http://schemas.microsoft.com/office/drawing/2014/main" id="{89D8689A-8408-E60A-7604-D7BFA30F088E}"/>
+              </a:ext>
+            </a:extLst>
+          </p:cNvPr>
+          <p:cNvPicPr>
+            <a:picLocks noChangeAspect="1"/>
+          </p:cNvPicPr>
+          <p:nvPr/>
+        </p:nvPicPr>
+        <p:blipFill>
+          <a:blip r:embed="rId3"/>
+          <a:stretch>
+            <a:fillRect/>
+          </a:stretch>
+        </p:blipFill>
+        <p:spPr>
+          <a:xfrm>
+            <a:off x="7337337" y="1554480"/>
+            <a:ext cx="2398503" cy="1098873"/>
+          </a:xfrm>
+          <a:prstGeom prst="rect">
+            <a:avLst/>
+          </a:prstGeom>
+        </p:spPr>
+      </p:pic>
       <p:grpSp>
         <p:nvGrpSpPr>
-          <p:cNvPr id="27" name="Gruppieren 26">
-            <a:extLst>
-              <a:ext uri="{FF2B5EF4-FFF2-40B4-BE49-F238E27FC236}">
-                <a16:creationId xmlns:a16="http://schemas.microsoft.com/office/drawing/2014/main" id="{2AA34D97-4A11-C3D7-E469-97C854C3E124}"/>
+          <p:cNvPr id="6" name="Gruppieren 5">
+            <a:extLst>
+              <a:ext uri="{FF2B5EF4-FFF2-40B4-BE49-F238E27FC236}">
+                <a16:creationId xmlns:a16="http://schemas.microsoft.com/office/drawing/2014/main" id="{5CF4A904-B240-751E-924F-6004EF8D9D8A}"/>
               </a:ext>
             </a:extLst>
           </p:cNvPr>
@@ -7848,715 +8049,36 @@
           <p:nvPr/>
         </p:nvGrpSpPr>
         <p:grpSpPr>
-          <a:xfrm>
-            <a:off x="1575542" y="1554480"/>
-            <a:ext cx="8160298" cy="1301291"/>
-            <a:chOff x="1575542" y="1554480"/>
-            <a:chExt cx="8160298" cy="1301291"/>
+          <a:xfrm rot="10957499">
+            <a:off x="1575542" y="2014523"/>
+            <a:ext cx="7363087" cy="841248"/>
+            <a:chOff x="8487235" y="4177136"/>
+            <a:chExt cx="2199873" cy="841248"/>
           </a:xfrm>
         </p:grpSpPr>
-        <p:pic>
-          <p:nvPicPr>
-            <p:cNvPr id="5" name="Grafik 4">
+        <p:sp>
+          <p:nvSpPr>
+            <p:cNvPr id="7" name="Bogen 6">
               <a:extLst>
                 <a:ext uri="{FF2B5EF4-FFF2-40B4-BE49-F238E27FC236}">
-                  <a16:creationId xmlns:a16="http://schemas.microsoft.com/office/drawing/2014/main" id="{89D8689A-8408-E60A-7604-D7BFA30F088E}"/>
+                  <a16:creationId xmlns:a16="http://schemas.microsoft.com/office/drawing/2014/main" id="{D4C21179-F3D3-AAEA-1901-D9BD5D44762D}"/>
                 </a:ext>
               </a:extLst>
             </p:cNvPr>
-            <p:cNvPicPr>
-              <a:picLocks noChangeAspect="1"/>
-            </p:cNvPicPr>
+            <p:cNvSpPr/>
             <p:nvPr/>
-          </p:nvPicPr>
-          <p:blipFill>
-            <a:blip r:embed="rId3"/>
-            <a:stretch>
-              <a:fillRect/>
-            </a:stretch>
-          </p:blipFill>
+          </p:nvSpPr>
           <p:spPr>
             <a:xfrm>
-              <a:off x="7337337" y="1554480"/>
-              <a:ext cx="2398503" cy="1098873"/>
+              <a:off x="8531603" y="4177136"/>
+              <a:ext cx="2155505" cy="841248"/>
             </a:xfrm>
-            <a:prstGeom prst="rect">
-              <a:avLst/>
+            <a:prstGeom prst="arc">
+              <a:avLst>
+                <a:gd name="adj1" fmla="val 10743950"/>
+                <a:gd name="adj2" fmla="val 0"/>
+              </a:avLst>
             </a:prstGeom>
-          </p:spPr>
-        </p:pic>
-        <p:grpSp>
-          <p:nvGrpSpPr>
-            <p:cNvPr id="6" name="Gruppieren 5">
-              <a:extLst>
-                <a:ext uri="{FF2B5EF4-FFF2-40B4-BE49-F238E27FC236}">
-                  <a16:creationId xmlns:a16="http://schemas.microsoft.com/office/drawing/2014/main" id="{5CF4A904-B240-751E-924F-6004EF8D9D8A}"/>
-                </a:ext>
-              </a:extLst>
-            </p:cNvPr>
-            <p:cNvGrpSpPr/>
-            <p:nvPr/>
-          </p:nvGrpSpPr>
-          <p:grpSpPr>
-            <a:xfrm rot="10957499">
-              <a:off x="1575542" y="2014523"/>
-              <a:ext cx="7363087" cy="841248"/>
-              <a:chOff x="8487235" y="4177136"/>
-              <a:chExt cx="2199873" cy="841248"/>
-            </a:xfrm>
-          </p:grpSpPr>
-          <p:sp>
-            <p:nvSpPr>
-              <p:cNvPr id="7" name="Bogen 6">
-                <a:extLst>
-                  <a:ext uri="{FF2B5EF4-FFF2-40B4-BE49-F238E27FC236}">
-                    <a16:creationId xmlns:a16="http://schemas.microsoft.com/office/drawing/2014/main" id="{D4C21179-F3D3-AAEA-1901-D9BD5D44762D}"/>
-                  </a:ext>
-                </a:extLst>
-              </p:cNvPr>
-              <p:cNvSpPr/>
-              <p:nvPr/>
-            </p:nvSpPr>
-            <p:spPr>
-              <a:xfrm>
-                <a:off x="8531603" y="4177136"/>
-                <a:ext cx="2155505" cy="841248"/>
-              </a:xfrm>
-              <a:prstGeom prst="arc">
-                <a:avLst>
-                  <a:gd name="adj1" fmla="val 10743950"/>
-                  <a:gd name="adj2" fmla="val 0"/>
-                </a:avLst>
-              </a:prstGeom>
-            </p:spPr>
-            <p:style>
-              <a:lnRef idx="3">
-                <a:schemeClr val="dk1"/>
-              </a:lnRef>
-              <a:fillRef idx="0">
-                <a:schemeClr val="dk1"/>
-              </a:fillRef>
-              <a:effectRef idx="2">
-                <a:schemeClr val="dk1"/>
-              </a:effectRef>
-              <a:fontRef idx="minor">
-                <a:schemeClr val="tx1"/>
-              </a:fontRef>
-            </p:style>
-            <p:txBody>
-              <a:bodyPr rtlCol="0" anchor="ctr"/>
-              <a:lstStyle/>
-              <a:p>
-                <a:pPr algn="ctr"/>
-                <a:endParaRPr lang="de-DE"/>
-              </a:p>
-            </p:txBody>
-          </p:sp>
-          <mc:AlternateContent xmlns:mc="http://schemas.openxmlformats.org/markup-compatibility/2006" xmlns:p14="http://schemas.microsoft.com/office/powerpoint/2010/main">
-            <mc:Choice Requires="p14">
-              <p:contentPart p14:bwMode="auto" r:id="rId4">
-                <p14:nvContentPartPr>
-                  <p14:cNvPr id="8" name="Freihand 7">
-                    <a:extLst>
-                      <a:ext uri="{FF2B5EF4-FFF2-40B4-BE49-F238E27FC236}">
-                        <a16:creationId xmlns:a16="http://schemas.microsoft.com/office/drawing/2014/main" id="{ACE1FBC4-DA7A-9C1B-DADF-FDE700E76B5A}"/>
-                      </a:ext>
-                    </a:extLst>
-                  </p14:cNvPr>
-                  <p14:cNvContentPartPr/>
-                  <p14:nvPr/>
-                </p14:nvContentPartPr>
-                <p14:xfrm rot="12692638" flipV="1">
-                  <a:off x="8487235" y="4476469"/>
-                  <a:ext cx="88735" cy="165615"/>
-                </p14:xfrm>
-              </p:contentPart>
-            </mc:Choice>
-            <mc:Fallback xmlns="">
-              <p:pic>
-                <p:nvPicPr>
-                  <p:cNvPr id="8" name="Freihand 7">
-                    <a:extLst>
-                      <a:ext uri="{FF2B5EF4-FFF2-40B4-BE49-F238E27FC236}">
-                        <a16:creationId xmlns:a16="http://schemas.microsoft.com/office/drawing/2014/main" id="{ACE1FBC4-DA7A-9C1B-DADF-FDE700E76B5A}"/>
-                      </a:ext>
-                    </a:extLst>
-                  </p:cNvPr>
-                  <p:cNvPicPr/>
-                  <p:nvPr/>
-                </p:nvPicPr>
-                <p:blipFill>
-                  <a:blip r:embed="rId5"/>
-                  <a:stretch>
-                    <a:fillRect/>
-                  </a:stretch>
-                </p:blipFill>
-                <p:spPr>
-                  <a:xfrm rot="12692638" flipV="1">
-                    <a:off x="8485404" y="4470348"/>
-                    <a:ext cx="92396" cy="177856"/>
-                  </a:xfrm>
-                  <a:prstGeom prst="rect">
-                    <a:avLst/>
-                  </a:prstGeom>
-                </p:spPr>
-              </p:pic>
-            </mc:Fallback>
-          </mc:AlternateContent>
-        </p:grpSp>
-        <p:grpSp>
-          <p:nvGrpSpPr>
-            <p:cNvPr id="9" name="Gruppieren 8">
-              <a:extLst>
-                <a:ext uri="{FF2B5EF4-FFF2-40B4-BE49-F238E27FC236}">
-                  <a16:creationId xmlns:a16="http://schemas.microsoft.com/office/drawing/2014/main" id="{46B9D2CF-C994-9047-1BC3-44070FEB850D}"/>
-                </a:ext>
-              </a:extLst>
-            </p:cNvPr>
-            <p:cNvGrpSpPr/>
-            <p:nvPr/>
-          </p:nvGrpSpPr>
-          <p:grpSpPr>
-            <a:xfrm rot="228950" flipH="1">
-              <a:off x="3936664" y="1563288"/>
-              <a:ext cx="4318672" cy="841248"/>
-              <a:chOff x="8487235" y="4177136"/>
-              <a:chExt cx="2199873" cy="841248"/>
-            </a:xfrm>
-          </p:grpSpPr>
-          <p:sp>
-            <p:nvSpPr>
-              <p:cNvPr id="10" name="Bogen 9">
-                <a:extLst>
-                  <a:ext uri="{FF2B5EF4-FFF2-40B4-BE49-F238E27FC236}">
-                    <a16:creationId xmlns:a16="http://schemas.microsoft.com/office/drawing/2014/main" id="{3166F096-8828-5635-14D5-D2BE3C1A10F0}"/>
-                  </a:ext>
-                </a:extLst>
-              </p:cNvPr>
-              <p:cNvSpPr/>
-              <p:nvPr/>
-            </p:nvSpPr>
-            <p:spPr>
-              <a:xfrm>
-                <a:off x="8531603" y="4177136"/>
-                <a:ext cx="2155505" cy="841248"/>
-              </a:xfrm>
-              <a:prstGeom prst="arc">
-                <a:avLst>
-                  <a:gd name="adj1" fmla="val 10743950"/>
-                  <a:gd name="adj2" fmla="val 0"/>
-                </a:avLst>
-              </a:prstGeom>
-            </p:spPr>
-            <p:style>
-              <a:lnRef idx="3">
-                <a:schemeClr val="dk1"/>
-              </a:lnRef>
-              <a:fillRef idx="0">
-                <a:schemeClr val="dk1"/>
-              </a:fillRef>
-              <a:effectRef idx="2">
-                <a:schemeClr val="dk1"/>
-              </a:effectRef>
-              <a:fontRef idx="minor">
-                <a:schemeClr val="tx1"/>
-              </a:fontRef>
-            </p:style>
-            <p:txBody>
-              <a:bodyPr rtlCol="0" anchor="ctr"/>
-              <a:lstStyle/>
-              <a:p>
-                <a:pPr algn="ctr"/>
-                <a:endParaRPr lang="de-DE"/>
-              </a:p>
-            </p:txBody>
-          </p:sp>
-          <mc:AlternateContent xmlns:mc="http://schemas.openxmlformats.org/markup-compatibility/2006" xmlns:p14="http://schemas.microsoft.com/office/powerpoint/2010/main">
-            <mc:Choice Requires="p14">
-              <p:contentPart p14:bwMode="auto" r:id="rId6">
-                <p14:nvContentPartPr>
-                  <p14:cNvPr id="11" name="Freihand 10">
-                    <a:extLst>
-                      <a:ext uri="{FF2B5EF4-FFF2-40B4-BE49-F238E27FC236}">
-                        <a16:creationId xmlns:a16="http://schemas.microsoft.com/office/drawing/2014/main" id="{574B402E-EEBA-B41E-C389-1A27CCA1D319}"/>
-                      </a:ext>
-                    </a:extLst>
-                  </p14:cNvPr>
-                  <p14:cNvContentPartPr/>
-                  <p14:nvPr/>
-                </p14:nvContentPartPr>
-                <p14:xfrm rot="12692638" flipV="1">
-                  <a:off x="8487235" y="4476469"/>
-                  <a:ext cx="88735" cy="165615"/>
-                </p14:xfrm>
-              </p:contentPart>
-            </mc:Choice>
-            <mc:Fallback xmlns="">
-              <p:pic>
-                <p:nvPicPr>
-                  <p:cNvPr id="11" name="Freihand 10">
-                    <a:extLst>
-                      <a:ext uri="{FF2B5EF4-FFF2-40B4-BE49-F238E27FC236}">
-                        <a16:creationId xmlns:a16="http://schemas.microsoft.com/office/drawing/2014/main" id="{574B402E-EEBA-B41E-C389-1A27CCA1D319}"/>
-                      </a:ext>
-                    </a:extLst>
-                  </p:cNvPr>
-                  <p:cNvPicPr/>
-                  <p:nvPr/>
-                </p:nvPicPr>
-                <p:blipFill>
-                  <a:blip r:embed="rId7"/>
-                  <a:stretch>
-                    <a:fillRect/>
-                  </a:stretch>
-                </p:blipFill>
-                <p:spPr>
-                  <a:xfrm rot="12692638" flipV="1">
-                    <a:off x="8484118" y="4470348"/>
-                    <a:ext cx="94968" cy="177856"/>
-                  </a:xfrm>
-                  <a:prstGeom prst="rect">
-                    <a:avLst/>
-                  </a:prstGeom>
-                </p:spPr>
-              </p:pic>
-            </mc:Fallback>
-          </mc:AlternateContent>
-        </p:grpSp>
-        <p:grpSp>
-          <p:nvGrpSpPr>
-            <p:cNvPr id="12" name="Gruppieren 11">
-              <a:extLst>
-                <a:ext uri="{FF2B5EF4-FFF2-40B4-BE49-F238E27FC236}">
-                  <a16:creationId xmlns:a16="http://schemas.microsoft.com/office/drawing/2014/main" id="{48C62CB1-A430-FE78-9696-81012A0B25C2}"/>
-                </a:ext>
-              </a:extLst>
-            </p:cNvPr>
-            <p:cNvGrpSpPr/>
-            <p:nvPr/>
-          </p:nvGrpSpPr>
-          <p:grpSpPr>
-            <a:xfrm rot="11219394">
-              <a:off x="5867844" y="2107650"/>
-              <a:ext cx="1793582" cy="572660"/>
-              <a:chOff x="8440548" y="4177136"/>
-              <a:chExt cx="2246560" cy="841248"/>
-            </a:xfrm>
-          </p:grpSpPr>
-          <p:sp>
-            <p:nvSpPr>
-              <p:cNvPr id="13" name="Bogen 12">
-                <a:extLst>
-                  <a:ext uri="{FF2B5EF4-FFF2-40B4-BE49-F238E27FC236}">
-                    <a16:creationId xmlns:a16="http://schemas.microsoft.com/office/drawing/2014/main" id="{856434DC-EBAD-9BDD-A298-373D66F60A51}"/>
-                  </a:ext>
-                </a:extLst>
-              </p:cNvPr>
-              <p:cNvSpPr/>
-              <p:nvPr/>
-            </p:nvSpPr>
-            <p:spPr>
-              <a:xfrm>
-                <a:off x="8531603" y="4177136"/>
-                <a:ext cx="2155505" cy="841248"/>
-              </a:xfrm>
-              <a:prstGeom prst="arc">
-                <a:avLst>
-                  <a:gd name="adj1" fmla="val 10743950"/>
-                  <a:gd name="adj2" fmla="val 0"/>
-                </a:avLst>
-              </a:prstGeom>
-            </p:spPr>
-            <p:style>
-              <a:lnRef idx="3">
-                <a:schemeClr val="dk1"/>
-              </a:lnRef>
-              <a:fillRef idx="0">
-                <a:schemeClr val="dk1"/>
-              </a:fillRef>
-              <a:effectRef idx="2">
-                <a:schemeClr val="dk1"/>
-              </a:effectRef>
-              <a:fontRef idx="minor">
-                <a:schemeClr val="tx1"/>
-              </a:fontRef>
-            </p:style>
-            <p:txBody>
-              <a:bodyPr rtlCol="0" anchor="ctr"/>
-              <a:lstStyle/>
-              <a:p>
-                <a:pPr algn="ctr"/>
-                <a:endParaRPr lang="de-DE"/>
-              </a:p>
-            </p:txBody>
-          </p:sp>
-          <mc:AlternateContent xmlns:mc="http://schemas.openxmlformats.org/markup-compatibility/2006" xmlns:p14="http://schemas.microsoft.com/office/powerpoint/2010/main">
-            <mc:Choice Requires="p14">
-              <p:contentPart p14:bwMode="auto" r:id="rId8">
-                <p14:nvContentPartPr>
-                  <p14:cNvPr id="14" name="Freihand 13">
-                    <a:extLst>
-                      <a:ext uri="{FF2B5EF4-FFF2-40B4-BE49-F238E27FC236}">
-                        <a16:creationId xmlns:a16="http://schemas.microsoft.com/office/drawing/2014/main" id="{3082476C-08DB-C67F-AF9E-194BA25F64BE}"/>
-                      </a:ext>
-                    </a:extLst>
-                  </p14:cNvPr>
-                  <p14:cNvContentPartPr/>
-                  <p14:nvPr/>
-                </p14:nvContentPartPr>
-                <p14:xfrm>
-                  <a:off x="8440548" y="4481426"/>
-                  <a:ext cx="271800" cy="140040"/>
-                </p14:xfrm>
-              </p:contentPart>
-            </mc:Choice>
-            <mc:Fallback xmlns="">
-              <p:pic>
-                <p:nvPicPr>
-                  <p:cNvPr id="16" name="Freihand 15">
-                    <a:extLst>
-                      <a:ext uri="{FF2B5EF4-FFF2-40B4-BE49-F238E27FC236}">
-                        <a16:creationId xmlns:a16="http://schemas.microsoft.com/office/drawing/2014/main" id="{85C3B65C-6361-A6C5-6F9A-1B32B4EEBF3B}"/>
-                      </a:ext>
-                    </a:extLst>
-                  </p:cNvPr>
-                  <p:cNvPicPr/>
-                  <p:nvPr/>
-                </p:nvPicPr>
-                <p:blipFill>
-                  <a:blip r:embed="rId9"/>
-                  <a:stretch>
-                    <a:fillRect/>
-                  </a:stretch>
-                </p:blipFill>
-                <p:spPr>
-                  <a:xfrm>
-                    <a:off x="8434428" y="4475306"/>
-                    <a:ext cx="284040" cy="152280"/>
-                  </a:xfrm>
-                  <a:prstGeom prst="rect">
-                    <a:avLst/>
-                  </a:prstGeom>
-                </p:spPr>
-              </p:pic>
-            </mc:Fallback>
-          </mc:AlternateContent>
-        </p:grpSp>
-      </p:grpSp>
-      <p:grpSp>
-        <p:nvGrpSpPr>
-          <p:cNvPr id="26" name="Gruppieren 25">
-            <a:extLst>
-              <a:ext uri="{FF2B5EF4-FFF2-40B4-BE49-F238E27FC236}">
-                <a16:creationId xmlns:a16="http://schemas.microsoft.com/office/drawing/2014/main" id="{1CD721B3-2C08-3248-1674-8FCAD4B7B6EA}"/>
-              </a:ext>
-            </a:extLst>
-          </p:cNvPr>
-          <p:cNvGrpSpPr/>
-          <p:nvPr/>
-        </p:nvGrpSpPr>
-        <p:grpSpPr>
-          <a:xfrm>
-            <a:off x="1618060" y="3608130"/>
-            <a:ext cx="8366843" cy="1695390"/>
-            <a:chOff x="1618060" y="3608130"/>
-            <a:chExt cx="8366843" cy="1695390"/>
-          </a:xfrm>
-        </p:grpSpPr>
-        <p:pic>
-          <p:nvPicPr>
-            <p:cNvPr id="16" name="Grafik 15">
-              <a:extLst>
-                <a:ext uri="{FF2B5EF4-FFF2-40B4-BE49-F238E27FC236}">
-                  <a16:creationId xmlns:a16="http://schemas.microsoft.com/office/drawing/2014/main" id="{B722FB85-A71A-BBD2-DB77-06B7CBD108D4}"/>
-                </a:ext>
-              </a:extLst>
-            </p:cNvPr>
-            <p:cNvPicPr>
-              <a:picLocks noChangeAspect="1"/>
-            </p:cNvPicPr>
-            <p:nvPr/>
-          </p:nvPicPr>
-          <p:blipFill>
-            <a:blip r:embed="rId10"/>
-            <a:stretch>
-              <a:fillRect/>
-            </a:stretch>
-          </p:blipFill>
-          <p:spPr>
-            <a:xfrm>
-              <a:off x="7841479" y="3817413"/>
-              <a:ext cx="2143424" cy="1486107"/>
-            </a:xfrm>
-            <a:prstGeom prst="rect">
-              <a:avLst/>
-            </a:prstGeom>
-          </p:spPr>
-        </p:pic>
-        <p:grpSp>
-          <p:nvGrpSpPr>
-            <p:cNvPr id="17" name="Gruppieren 16">
-              <a:extLst>
-                <a:ext uri="{FF2B5EF4-FFF2-40B4-BE49-F238E27FC236}">
-                  <a16:creationId xmlns:a16="http://schemas.microsoft.com/office/drawing/2014/main" id="{697DB359-E402-BB4B-EFA8-C04A0A287A80}"/>
-                </a:ext>
-              </a:extLst>
-            </p:cNvPr>
-            <p:cNvGrpSpPr/>
-            <p:nvPr/>
-          </p:nvGrpSpPr>
-          <p:grpSpPr>
-            <a:xfrm rot="10998562" flipV="1">
-              <a:off x="1618060" y="3608130"/>
-              <a:ext cx="7363087" cy="925109"/>
-              <a:chOff x="8487235" y="4177136"/>
-              <a:chExt cx="2199873" cy="841248"/>
-            </a:xfrm>
-          </p:grpSpPr>
-          <p:sp>
-            <p:nvSpPr>
-              <p:cNvPr id="18" name="Bogen 17">
-                <a:extLst>
-                  <a:ext uri="{FF2B5EF4-FFF2-40B4-BE49-F238E27FC236}">
-                    <a16:creationId xmlns:a16="http://schemas.microsoft.com/office/drawing/2014/main" id="{24F9B0B9-C873-7B06-7F5F-429E2C85CA1D}"/>
-                  </a:ext>
-                </a:extLst>
-              </p:cNvPr>
-              <p:cNvSpPr/>
-              <p:nvPr/>
-            </p:nvSpPr>
-            <p:spPr>
-              <a:xfrm>
-                <a:off x="8531603" y="4177136"/>
-                <a:ext cx="2155505" cy="841248"/>
-              </a:xfrm>
-              <a:prstGeom prst="arc">
-                <a:avLst>
-                  <a:gd name="adj1" fmla="val 10743950"/>
-                  <a:gd name="adj2" fmla="val 0"/>
-                </a:avLst>
-              </a:prstGeom>
-            </p:spPr>
-            <p:style>
-              <a:lnRef idx="3">
-                <a:schemeClr val="dk1"/>
-              </a:lnRef>
-              <a:fillRef idx="0">
-                <a:schemeClr val="dk1"/>
-              </a:fillRef>
-              <a:effectRef idx="2">
-                <a:schemeClr val="dk1"/>
-              </a:effectRef>
-              <a:fontRef idx="minor">
-                <a:schemeClr val="tx1"/>
-              </a:fontRef>
-            </p:style>
-            <p:txBody>
-              <a:bodyPr rtlCol="0" anchor="ctr"/>
-              <a:lstStyle/>
-              <a:p>
-                <a:pPr algn="ctr"/>
-                <a:endParaRPr lang="de-DE"/>
-              </a:p>
-            </p:txBody>
-          </p:sp>
-          <mc:AlternateContent xmlns:mc="http://schemas.openxmlformats.org/markup-compatibility/2006" xmlns:p14="http://schemas.microsoft.com/office/powerpoint/2010/main">
-            <mc:Choice Requires="p14">
-              <p:contentPart p14:bwMode="auto" r:id="rId11">
-                <p14:nvContentPartPr>
-                  <p14:cNvPr id="19" name="Freihand 18">
-                    <a:extLst>
-                      <a:ext uri="{FF2B5EF4-FFF2-40B4-BE49-F238E27FC236}">
-                        <a16:creationId xmlns:a16="http://schemas.microsoft.com/office/drawing/2014/main" id="{156220C4-06F4-6FD8-A888-49F15EE43FDE}"/>
-                      </a:ext>
-                    </a:extLst>
-                  </p14:cNvPr>
-                  <p14:cNvContentPartPr/>
-                  <p14:nvPr/>
-                </p14:nvContentPartPr>
-                <p14:xfrm rot="12692638" flipV="1">
-                  <a:off x="8487235" y="4476469"/>
-                  <a:ext cx="88735" cy="165615"/>
-                </p14:xfrm>
-              </p:contentPart>
-            </mc:Choice>
-            <mc:Fallback xmlns="">
-              <p:pic>
-                <p:nvPicPr>
-                  <p:cNvPr id="19" name="Freihand 18">
-                    <a:extLst>
-                      <a:ext uri="{FF2B5EF4-FFF2-40B4-BE49-F238E27FC236}">
-                        <a16:creationId xmlns:a16="http://schemas.microsoft.com/office/drawing/2014/main" id="{156220C4-06F4-6FD8-A888-49F15EE43FDE}"/>
-                      </a:ext>
-                    </a:extLst>
-                  </p:cNvPr>
-                  <p:cNvPicPr/>
-                  <p:nvPr/>
-                </p:nvPicPr>
-                <p:blipFill>
-                  <a:blip r:embed="rId12"/>
-                  <a:stretch>
-                    <a:fillRect/>
-                  </a:stretch>
-                </p:blipFill>
-                <p:spPr>
-                  <a:xfrm rot="12692638" flipV="1">
-                    <a:off x="8485404" y="4470905"/>
-                    <a:ext cx="92396" cy="176743"/>
-                  </a:xfrm>
-                  <a:prstGeom prst="rect">
-                    <a:avLst/>
-                  </a:prstGeom>
-                </p:spPr>
-              </p:pic>
-            </mc:Fallback>
-          </mc:AlternateContent>
-        </p:grpSp>
-        <p:grpSp>
-          <p:nvGrpSpPr>
-            <p:cNvPr id="20" name="Gruppieren 19">
-              <a:extLst>
-                <a:ext uri="{FF2B5EF4-FFF2-40B4-BE49-F238E27FC236}">
-                  <a16:creationId xmlns:a16="http://schemas.microsoft.com/office/drawing/2014/main" id="{9BB1E1B1-50A9-2631-FDDA-956D420A1462}"/>
-                </a:ext>
-              </a:extLst>
-            </p:cNvPr>
-            <p:cNvGrpSpPr/>
-            <p:nvPr/>
-          </p:nvGrpSpPr>
-          <p:grpSpPr>
-            <a:xfrm rot="396559" flipH="1" flipV="1">
-              <a:off x="3821458" y="3914468"/>
-              <a:ext cx="4318672" cy="1144317"/>
-              <a:chOff x="8487235" y="4177136"/>
-              <a:chExt cx="2199873" cy="841248"/>
-            </a:xfrm>
-          </p:grpSpPr>
-          <p:sp>
-            <p:nvSpPr>
-              <p:cNvPr id="21" name="Bogen 20">
-                <a:extLst>
-                  <a:ext uri="{FF2B5EF4-FFF2-40B4-BE49-F238E27FC236}">
-                    <a16:creationId xmlns:a16="http://schemas.microsoft.com/office/drawing/2014/main" id="{FA7A17D7-25F3-A773-3D53-5937DB0A07A4}"/>
-                  </a:ext>
-                </a:extLst>
-              </p:cNvPr>
-              <p:cNvSpPr/>
-              <p:nvPr/>
-            </p:nvSpPr>
-            <p:spPr>
-              <a:xfrm>
-                <a:off x="8531603" y="4177136"/>
-                <a:ext cx="2155505" cy="841248"/>
-              </a:xfrm>
-              <a:prstGeom prst="arc">
-                <a:avLst>
-                  <a:gd name="adj1" fmla="val 10743950"/>
-                  <a:gd name="adj2" fmla="val 0"/>
-                </a:avLst>
-              </a:prstGeom>
-            </p:spPr>
-            <p:style>
-              <a:lnRef idx="3">
-                <a:schemeClr val="dk1"/>
-              </a:lnRef>
-              <a:fillRef idx="0">
-                <a:schemeClr val="dk1"/>
-              </a:fillRef>
-              <a:effectRef idx="2">
-                <a:schemeClr val="dk1"/>
-              </a:effectRef>
-              <a:fontRef idx="minor">
-                <a:schemeClr val="tx1"/>
-              </a:fontRef>
-            </p:style>
-            <p:txBody>
-              <a:bodyPr rtlCol="0" anchor="ctr"/>
-              <a:lstStyle/>
-              <a:p>
-                <a:pPr algn="ctr"/>
-                <a:endParaRPr lang="de-DE"/>
-              </a:p>
-            </p:txBody>
-          </p:sp>
-          <mc:AlternateContent xmlns:mc="http://schemas.openxmlformats.org/markup-compatibility/2006" xmlns:p14="http://schemas.microsoft.com/office/powerpoint/2010/main">
-            <mc:Choice Requires="p14">
-              <p:contentPart p14:bwMode="auto" r:id="rId13">
-                <p14:nvContentPartPr>
-                  <p14:cNvPr id="22" name="Freihand 21">
-                    <a:extLst>
-                      <a:ext uri="{FF2B5EF4-FFF2-40B4-BE49-F238E27FC236}">
-                        <a16:creationId xmlns:a16="http://schemas.microsoft.com/office/drawing/2014/main" id="{5062D448-F697-20DF-6189-E22432B4FFF9}"/>
-                      </a:ext>
-                    </a:extLst>
-                  </p14:cNvPr>
-                  <p14:cNvContentPartPr/>
-                  <p14:nvPr/>
-                </p14:nvContentPartPr>
-                <p14:xfrm rot="12692638" flipV="1">
-                  <a:off x="8487235" y="4476469"/>
-                  <a:ext cx="88735" cy="165615"/>
-                </p14:xfrm>
-              </p:contentPart>
-            </mc:Choice>
-            <mc:Fallback xmlns="">
-              <p:pic>
-                <p:nvPicPr>
-                  <p:cNvPr id="22" name="Freihand 21">
-                    <a:extLst>
-                      <a:ext uri="{FF2B5EF4-FFF2-40B4-BE49-F238E27FC236}">
-                        <a16:creationId xmlns:a16="http://schemas.microsoft.com/office/drawing/2014/main" id="{5062D448-F697-20DF-6189-E22432B4FFF9}"/>
-                      </a:ext>
-                    </a:extLst>
-                  </p:cNvPr>
-                  <p:cNvPicPr/>
-                  <p:nvPr/>
-                </p:nvPicPr>
-                <p:blipFill>
-                  <a:blip r:embed="rId14"/>
-                  <a:stretch>
-                    <a:fillRect/>
-                  </a:stretch>
-                </p:blipFill>
-                <p:spPr>
-                  <a:xfrm rot="12692638" flipV="1">
-                    <a:off x="8484118" y="4471964"/>
-                    <a:ext cx="94968" cy="174624"/>
-                  </a:xfrm>
-                  <a:prstGeom prst="rect">
-                    <a:avLst/>
-                  </a:prstGeom>
-                </p:spPr>
-              </p:pic>
-            </mc:Fallback>
-          </mc:AlternateContent>
-        </p:grpSp>
-        <p:cxnSp>
-          <p:nvCxnSpPr>
-            <p:cNvPr id="23" name="Gerade Verbindung mit Pfeil 22">
-              <a:extLst>
-                <a:ext uri="{FF2B5EF4-FFF2-40B4-BE49-F238E27FC236}">
-                  <a16:creationId xmlns:a16="http://schemas.microsoft.com/office/drawing/2014/main" id="{C8878F27-E9F7-EDF3-DD38-3898AFAA1042}"/>
-                </a:ext>
-              </a:extLst>
-            </p:cNvPr>
-            <p:cNvCxnSpPr>
-              <a:cxnSpLocks/>
-            </p:cNvCxnSpPr>
-            <p:nvPr/>
-          </p:nvCxnSpPr>
-          <p:spPr>
-            <a:xfrm>
-              <a:off x="6311900" y="4296833"/>
-              <a:ext cx="1684867" cy="715434"/>
-            </a:xfrm>
-            <a:prstGeom prst="straightConnector1">
-              <a:avLst/>
-            </a:prstGeom>
-            <a:ln>
-              <a:headEnd type="none" w="med" len="med"/>
-              <a:tailEnd type="arrow" w="med" len="med"/>
-            </a:ln>
           </p:spPr>
           <p:style>
             <a:lnRef idx="3">
@@ -8572,8 +8094,615 @@
               <a:schemeClr val="tx1"/>
             </a:fontRef>
           </p:style>
-        </p:cxnSp>
+          <p:txBody>
+            <a:bodyPr rtlCol="0" anchor="ctr"/>
+            <a:lstStyle/>
+            <a:p>
+              <a:pPr algn="ctr"/>
+              <a:endParaRPr lang="de-DE"/>
+            </a:p>
+          </p:txBody>
+        </p:sp>
+        <mc:AlternateContent xmlns:mc="http://schemas.openxmlformats.org/markup-compatibility/2006" xmlns:p14="http://schemas.microsoft.com/office/powerpoint/2010/main">
+          <mc:Choice Requires="p14">
+            <p:contentPart p14:bwMode="auto" r:id="rId4">
+              <p14:nvContentPartPr>
+                <p14:cNvPr id="8" name="Freihand 7">
+                  <a:extLst>
+                    <a:ext uri="{FF2B5EF4-FFF2-40B4-BE49-F238E27FC236}">
+                      <a16:creationId xmlns:a16="http://schemas.microsoft.com/office/drawing/2014/main" id="{ACE1FBC4-DA7A-9C1B-DADF-FDE700E76B5A}"/>
+                    </a:ext>
+                  </a:extLst>
+                </p14:cNvPr>
+                <p14:cNvContentPartPr/>
+                <p14:nvPr/>
+              </p14:nvContentPartPr>
+              <p14:xfrm rot="12692638" flipV="1">
+                <a:off x="8487235" y="4476469"/>
+                <a:ext cx="88735" cy="165615"/>
+              </p14:xfrm>
+            </p:contentPart>
+          </mc:Choice>
+          <mc:Fallback xmlns="">
+            <p:pic>
+              <p:nvPicPr>
+                <p:cNvPr id="8" name="Freihand 7">
+                  <a:extLst>
+                    <a:ext uri="{FF2B5EF4-FFF2-40B4-BE49-F238E27FC236}">
+                      <a16:creationId xmlns:a16="http://schemas.microsoft.com/office/drawing/2014/main" id="{ACE1FBC4-DA7A-9C1B-DADF-FDE700E76B5A}"/>
+                    </a:ext>
+                  </a:extLst>
+                </p:cNvPr>
+                <p:cNvPicPr/>
+                <p:nvPr/>
+              </p:nvPicPr>
+              <p:blipFill>
+                <a:blip r:embed="rId5"/>
+                <a:stretch>
+                  <a:fillRect/>
+                </a:stretch>
+              </p:blipFill>
+              <p:spPr>
+                <a:xfrm rot="12692638" flipV="1">
+                  <a:off x="8485404" y="4470348"/>
+                  <a:ext cx="92396" cy="177856"/>
+                </a:xfrm>
+                <a:prstGeom prst="rect">
+                  <a:avLst/>
+                </a:prstGeom>
+              </p:spPr>
+            </p:pic>
+          </mc:Fallback>
+        </mc:AlternateContent>
       </p:grpSp>
+      <p:grpSp>
+        <p:nvGrpSpPr>
+          <p:cNvPr id="9" name="Gruppieren 8">
+            <a:extLst>
+              <a:ext uri="{FF2B5EF4-FFF2-40B4-BE49-F238E27FC236}">
+                <a16:creationId xmlns:a16="http://schemas.microsoft.com/office/drawing/2014/main" id="{46B9D2CF-C994-9047-1BC3-44070FEB850D}"/>
+              </a:ext>
+            </a:extLst>
+          </p:cNvPr>
+          <p:cNvGrpSpPr/>
+          <p:nvPr/>
+        </p:nvGrpSpPr>
+        <p:grpSpPr>
+          <a:xfrm rot="228950" flipH="1">
+            <a:off x="3936664" y="1563288"/>
+            <a:ext cx="4318672" cy="841248"/>
+            <a:chOff x="8487235" y="4177136"/>
+            <a:chExt cx="2199873" cy="841248"/>
+          </a:xfrm>
+        </p:grpSpPr>
+        <p:sp>
+          <p:nvSpPr>
+            <p:cNvPr id="10" name="Bogen 9">
+              <a:extLst>
+                <a:ext uri="{FF2B5EF4-FFF2-40B4-BE49-F238E27FC236}">
+                  <a16:creationId xmlns:a16="http://schemas.microsoft.com/office/drawing/2014/main" id="{3166F096-8828-5635-14D5-D2BE3C1A10F0}"/>
+                </a:ext>
+              </a:extLst>
+            </p:cNvPr>
+            <p:cNvSpPr/>
+            <p:nvPr/>
+          </p:nvSpPr>
+          <p:spPr>
+            <a:xfrm>
+              <a:off x="8531603" y="4177136"/>
+              <a:ext cx="2155505" cy="841248"/>
+            </a:xfrm>
+            <a:prstGeom prst="arc">
+              <a:avLst>
+                <a:gd name="adj1" fmla="val 10743950"/>
+                <a:gd name="adj2" fmla="val 0"/>
+              </a:avLst>
+            </a:prstGeom>
+          </p:spPr>
+          <p:style>
+            <a:lnRef idx="3">
+              <a:schemeClr val="dk1"/>
+            </a:lnRef>
+            <a:fillRef idx="0">
+              <a:schemeClr val="dk1"/>
+            </a:fillRef>
+            <a:effectRef idx="2">
+              <a:schemeClr val="dk1"/>
+            </a:effectRef>
+            <a:fontRef idx="minor">
+              <a:schemeClr val="tx1"/>
+            </a:fontRef>
+          </p:style>
+          <p:txBody>
+            <a:bodyPr rtlCol="0" anchor="ctr"/>
+            <a:lstStyle/>
+            <a:p>
+              <a:pPr algn="ctr"/>
+              <a:endParaRPr lang="de-DE"/>
+            </a:p>
+          </p:txBody>
+        </p:sp>
+        <mc:AlternateContent xmlns:mc="http://schemas.openxmlformats.org/markup-compatibility/2006" xmlns:p14="http://schemas.microsoft.com/office/powerpoint/2010/main">
+          <mc:Choice Requires="p14">
+            <p:contentPart p14:bwMode="auto" r:id="rId6">
+              <p14:nvContentPartPr>
+                <p14:cNvPr id="11" name="Freihand 10">
+                  <a:extLst>
+                    <a:ext uri="{FF2B5EF4-FFF2-40B4-BE49-F238E27FC236}">
+                      <a16:creationId xmlns:a16="http://schemas.microsoft.com/office/drawing/2014/main" id="{574B402E-EEBA-B41E-C389-1A27CCA1D319}"/>
+                    </a:ext>
+                  </a:extLst>
+                </p14:cNvPr>
+                <p14:cNvContentPartPr/>
+                <p14:nvPr/>
+              </p14:nvContentPartPr>
+              <p14:xfrm rot="12692638" flipV="1">
+                <a:off x="8487235" y="4476469"/>
+                <a:ext cx="88735" cy="165615"/>
+              </p14:xfrm>
+            </p:contentPart>
+          </mc:Choice>
+          <mc:Fallback xmlns="">
+            <p:pic>
+              <p:nvPicPr>
+                <p:cNvPr id="11" name="Freihand 10">
+                  <a:extLst>
+                    <a:ext uri="{FF2B5EF4-FFF2-40B4-BE49-F238E27FC236}">
+                      <a16:creationId xmlns:a16="http://schemas.microsoft.com/office/drawing/2014/main" id="{574B402E-EEBA-B41E-C389-1A27CCA1D319}"/>
+                    </a:ext>
+                  </a:extLst>
+                </p:cNvPr>
+                <p:cNvPicPr/>
+                <p:nvPr/>
+              </p:nvPicPr>
+              <p:blipFill>
+                <a:blip r:embed="rId7"/>
+                <a:stretch>
+                  <a:fillRect/>
+                </a:stretch>
+              </p:blipFill>
+              <p:spPr>
+                <a:xfrm rot="12692638" flipV="1">
+                  <a:off x="8484118" y="4470348"/>
+                  <a:ext cx="94968" cy="177856"/>
+                </a:xfrm>
+                <a:prstGeom prst="rect">
+                  <a:avLst/>
+                </a:prstGeom>
+              </p:spPr>
+            </p:pic>
+          </mc:Fallback>
+        </mc:AlternateContent>
+      </p:grpSp>
+      <p:grpSp>
+        <p:nvGrpSpPr>
+          <p:cNvPr id="12" name="Gruppieren 11">
+            <a:extLst>
+              <a:ext uri="{FF2B5EF4-FFF2-40B4-BE49-F238E27FC236}">
+                <a16:creationId xmlns:a16="http://schemas.microsoft.com/office/drawing/2014/main" id="{48C62CB1-A430-FE78-9696-81012A0B25C2}"/>
+              </a:ext>
+            </a:extLst>
+          </p:cNvPr>
+          <p:cNvGrpSpPr/>
+          <p:nvPr/>
+        </p:nvGrpSpPr>
+        <p:grpSpPr>
+          <a:xfrm rot="11219394">
+            <a:off x="5867844" y="2107650"/>
+            <a:ext cx="1793582" cy="572660"/>
+            <a:chOff x="8440548" y="4177136"/>
+            <a:chExt cx="2246560" cy="841248"/>
+          </a:xfrm>
+        </p:grpSpPr>
+        <p:sp>
+          <p:nvSpPr>
+            <p:cNvPr id="13" name="Bogen 12">
+              <a:extLst>
+                <a:ext uri="{FF2B5EF4-FFF2-40B4-BE49-F238E27FC236}">
+                  <a16:creationId xmlns:a16="http://schemas.microsoft.com/office/drawing/2014/main" id="{856434DC-EBAD-9BDD-A298-373D66F60A51}"/>
+                </a:ext>
+              </a:extLst>
+            </p:cNvPr>
+            <p:cNvSpPr/>
+            <p:nvPr/>
+          </p:nvSpPr>
+          <p:spPr>
+            <a:xfrm>
+              <a:off x="8531603" y="4177136"/>
+              <a:ext cx="2155505" cy="841248"/>
+            </a:xfrm>
+            <a:prstGeom prst="arc">
+              <a:avLst>
+                <a:gd name="adj1" fmla="val 10743950"/>
+                <a:gd name="adj2" fmla="val 0"/>
+              </a:avLst>
+            </a:prstGeom>
+          </p:spPr>
+          <p:style>
+            <a:lnRef idx="3">
+              <a:schemeClr val="dk1"/>
+            </a:lnRef>
+            <a:fillRef idx="0">
+              <a:schemeClr val="dk1"/>
+            </a:fillRef>
+            <a:effectRef idx="2">
+              <a:schemeClr val="dk1"/>
+            </a:effectRef>
+            <a:fontRef idx="minor">
+              <a:schemeClr val="tx1"/>
+            </a:fontRef>
+          </p:style>
+          <p:txBody>
+            <a:bodyPr rtlCol="0" anchor="ctr"/>
+            <a:lstStyle/>
+            <a:p>
+              <a:pPr algn="ctr"/>
+              <a:endParaRPr lang="de-DE"/>
+            </a:p>
+          </p:txBody>
+        </p:sp>
+        <mc:AlternateContent xmlns:mc="http://schemas.openxmlformats.org/markup-compatibility/2006" xmlns:p14="http://schemas.microsoft.com/office/powerpoint/2010/main">
+          <mc:Choice Requires="p14">
+            <p:contentPart p14:bwMode="auto" r:id="rId8">
+              <p14:nvContentPartPr>
+                <p14:cNvPr id="14" name="Freihand 13">
+                  <a:extLst>
+                    <a:ext uri="{FF2B5EF4-FFF2-40B4-BE49-F238E27FC236}">
+                      <a16:creationId xmlns:a16="http://schemas.microsoft.com/office/drawing/2014/main" id="{3082476C-08DB-C67F-AF9E-194BA25F64BE}"/>
+                    </a:ext>
+                  </a:extLst>
+                </p14:cNvPr>
+                <p14:cNvContentPartPr/>
+                <p14:nvPr/>
+              </p14:nvContentPartPr>
+              <p14:xfrm>
+                <a:off x="8440548" y="4481426"/>
+                <a:ext cx="271800" cy="140040"/>
+              </p14:xfrm>
+            </p:contentPart>
+          </mc:Choice>
+          <mc:Fallback xmlns="">
+            <p:pic>
+              <p:nvPicPr>
+                <p:cNvPr id="16" name="Freihand 15">
+                  <a:extLst>
+                    <a:ext uri="{FF2B5EF4-FFF2-40B4-BE49-F238E27FC236}">
+                      <a16:creationId xmlns:a16="http://schemas.microsoft.com/office/drawing/2014/main" id="{85C3B65C-6361-A6C5-6F9A-1B32B4EEBF3B}"/>
+                    </a:ext>
+                  </a:extLst>
+                </p:cNvPr>
+                <p:cNvPicPr/>
+                <p:nvPr/>
+              </p:nvPicPr>
+              <p:blipFill>
+                <a:blip r:embed="rId9"/>
+                <a:stretch>
+                  <a:fillRect/>
+                </a:stretch>
+              </p:blipFill>
+              <p:spPr>
+                <a:xfrm>
+                  <a:off x="8434428" y="4475306"/>
+                  <a:ext cx="284040" cy="152280"/>
+                </a:xfrm>
+                <a:prstGeom prst="rect">
+                  <a:avLst/>
+                </a:prstGeom>
+              </p:spPr>
+            </p:pic>
+          </mc:Fallback>
+        </mc:AlternateContent>
+      </p:grpSp>
+      <p:pic>
+        <p:nvPicPr>
+          <p:cNvPr id="16" name="Grafik 15">
+            <a:extLst>
+              <a:ext uri="{FF2B5EF4-FFF2-40B4-BE49-F238E27FC236}">
+                <a16:creationId xmlns:a16="http://schemas.microsoft.com/office/drawing/2014/main" id="{B722FB85-A71A-BBD2-DB77-06B7CBD108D4}"/>
+              </a:ext>
+            </a:extLst>
+          </p:cNvPr>
+          <p:cNvPicPr>
+            <a:picLocks noChangeAspect="1"/>
+          </p:cNvPicPr>
+          <p:nvPr/>
+        </p:nvPicPr>
+        <p:blipFill>
+          <a:blip r:embed="rId10"/>
+          <a:stretch>
+            <a:fillRect/>
+          </a:stretch>
+        </p:blipFill>
+        <p:spPr>
+          <a:xfrm>
+            <a:off x="7841479" y="3817413"/>
+            <a:ext cx="2143424" cy="1486107"/>
+          </a:xfrm>
+          <a:prstGeom prst="rect">
+            <a:avLst/>
+          </a:prstGeom>
+        </p:spPr>
+      </p:pic>
+      <p:grpSp>
+        <p:nvGrpSpPr>
+          <p:cNvPr id="17" name="Gruppieren 16">
+            <a:extLst>
+              <a:ext uri="{FF2B5EF4-FFF2-40B4-BE49-F238E27FC236}">
+                <a16:creationId xmlns:a16="http://schemas.microsoft.com/office/drawing/2014/main" id="{697DB359-E402-BB4B-EFA8-C04A0A287A80}"/>
+              </a:ext>
+            </a:extLst>
+          </p:cNvPr>
+          <p:cNvGrpSpPr/>
+          <p:nvPr/>
+        </p:nvGrpSpPr>
+        <p:grpSpPr>
+          <a:xfrm rot="10998562" flipV="1">
+            <a:off x="1618060" y="3608130"/>
+            <a:ext cx="7363087" cy="925109"/>
+            <a:chOff x="8487235" y="4177136"/>
+            <a:chExt cx="2199873" cy="841248"/>
+          </a:xfrm>
+        </p:grpSpPr>
+        <p:sp>
+          <p:nvSpPr>
+            <p:cNvPr id="18" name="Bogen 17">
+              <a:extLst>
+                <a:ext uri="{FF2B5EF4-FFF2-40B4-BE49-F238E27FC236}">
+                  <a16:creationId xmlns:a16="http://schemas.microsoft.com/office/drawing/2014/main" id="{24F9B0B9-C873-7B06-7F5F-429E2C85CA1D}"/>
+                </a:ext>
+              </a:extLst>
+            </p:cNvPr>
+            <p:cNvSpPr/>
+            <p:nvPr/>
+          </p:nvSpPr>
+          <p:spPr>
+            <a:xfrm>
+              <a:off x="8531603" y="4177136"/>
+              <a:ext cx="2155505" cy="841248"/>
+            </a:xfrm>
+            <a:prstGeom prst="arc">
+              <a:avLst>
+                <a:gd name="adj1" fmla="val 10743950"/>
+                <a:gd name="adj2" fmla="val 0"/>
+              </a:avLst>
+            </a:prstGeom>
+          </p:spPr>
+          <p:style>
+            <a:lnRef idx="3">
+              <a:schemeClr val="dk1"/>
+            </a:lnRef>
+            <a:fillRef idx="0">
+              <a:schemeClr val="dk1"/>
+            </a:fillRef>
+            <a:effectRef idx="2">
+              <a:schemeClr val="dk1"/>
+            </a:effectRef>
+            <a:fontRef idx="minor">
+              <a:schemeClr val="tx1"/>
+            </a:fontRef>
+          </p:style>
+          <p:txBody>
+            <a:bodyPr rtlCol="0" anchor="ctr"/>
+            <a:lstStyle/>
+            <a:p>
+              <a:pPr algn="ctr"/>
+              <a:endParaRPr lang="de-DE"/>
+            </a:p>
+          </p:txBody>
+        </p:sp>
+        <mc:AlternateContent xmlns:mc="http://schemas.openxmlformats.org/markup-compatibility/2006" xmlns:p14="http://schemas.microsoft.com/office/powerpoint/2010/main">
+          <mc:Choice Requires="p14">
+            <p:contentPart p14:bwMode="auto" r:id="rId11">
+              <p14:nvContentPartPr>
+                <p14:cNvPr id="19" name="Freihand 18">
+                  <a:extLst>
+                    <a:ext uri="{FF2B5EF4-FFF2-40B4-BE49-F238E27FC236}">
+                      <a16:creationId xmlns:a16="http://schemas.microsoft.com/office/drawing/2014/main" id="{156220C4-06F4-6FD8-A888-49F15EE43FDE}"/>
+                    </a:ext>
+                  </a:extLst>
+                </p14:cNvPr>
+                <p14:cNvContentPartPr/>
+                <p14:nvPr/>
+              </p14:nvContentPartPr>
+              <p14:xfrm rot="12692638" flipV="1">
+                <a:off x="8487235" y="4476469"/>
+                <a:ext cx="88735" cy="165615"/>
+              </p14:xfrm>
+            </p:contentPart>
+          </mc:Choice>
+          <mc:Fallback xmlns="">
+            <p:pic>
+              <p:nvPicPr>
+                <p:cNvPr id="19" name="Freihand 18">
+                  <a:extLst>
+                    <a:ext uri="{FF2B5EF4-FFF2-40B4-BE49-F238E27FC236}">
+                      <a16:creationId xmlns:a16="http://schemas.microsoft.com/office/drawing/2014/main" id="{156220C4-06F4-6FD8-A888-49F15EE43FDE}"/>
+                    </a:ext>
+                  </a:extLst>
+                </p:cNvPr>
+                <p:cNvPicPr/>
+                <p:nvPr/>
+              </p:nvPicPr>
+              <p:blipFill>
+                <a:blip r:embed="rId12"/>
+                <a:stretch>
+                  <a:fillRect/>
+                </a:stretch>
+              </p:blipFill>
+              <p:spPr>
+                <a:xfrm rot="12692638" flipV="1">
+                  <a:off x="8485404" y="4470905"/>
+                  <a:ext cx="92396" cy="176743"/>
+                </a:xfrm>
+                <a:prstGeom prst="rect">
+                  <a:avLst/>
+                </a:prstGeom>
+              </p:spPr>
+            </p:pic>
+          </mc:Fallback>
+        </mc:AlternateContent>
+      </p:grpSp>
+      <p:grpSp>
+        <p:nvGrpSpPr>
+          <p:cNvPr id="20" name="Gruppieren 19">
+            <a:extLst>
+              <a:ext uri="{FF2B5EF4-FFF2-40B4-BE49-F238E27FC236}">
+                <a16:creationId xmlns:a16="http://schemas.microsoft.com/office/drawing/2014/main" id="{9BB1E1B1-50A9-2631-FDDA-956D420A1462}"/>
+              </a:ext>
+            </a:extLst>
+          </p:cNvPr>
+          <p:cNvGrpSpPr/>
+          <p:nvPr/>
+        </p:nvGrpSpPr>
+        <p:grpSpPr>
+          <a:xfrm rot="396559" flipH="1" flipV="1">
+            <a:off x="3821458" y="3914468"/>
+            <a:ext cx="4318672" cy="1144317"/>
+            <a:chOff x="8487235" y="4177136"/>
+            <a:chExt cx="2199873" cy="841248"/>
+          </a:xfrm>
+        </p:grpSpPr>
+        <p:sp>
+          <p:nvSpPr>
+            <p:cNvPr id="21" name="Bogen 20">
+              <a:extLst>
+                <a:ext uri="{FF2B5EF4-FFF2-40B4-BE49-F238E27FC236}">
+                  <a16:creationId xmlns:a16="http://schemas.microsoft.com/office/drawing/2014/main" id="{FA7A17D7-25F3-A773-3D53-5937DB0A07A4}"/>
+                </a:ext>
+              </a:extLst>
+            </p:cNvPr>
+            <p:cNvSpPr/>
+            <p:nvPr/>
+          </p:nvSpPr>
+          <p:spPr>
+            <a:xfrm>
+              <a:off x="8531603" y="4177136"/>
+              <a:ext cx="2155505" cy="841248"/>
+            </a:xfrm>
+            <a:prstGeom prst="arc">
+              <a:avLst>
+                <a:gd name="adj1" fmla="val 10743950"/>
+                <a:gd name="adj2" fmla="val 0"/>
+              </a:avLst>
+            </a:prstGeom>
+          </p:spPr>
+          <p:style>
+            <a:lnRef idx="3">
+              <a:schemeClr val="dk1"/>
+            </a:lnRef>
+            <a:fillRef idx="0">
+              <a:schemeClr val="dk1"/>
+            </a:fillRef>
+            <a:effectRef idx="2">
+              <a:schemeClr val="dk1"/>
+            </a:effectRef>
+            <a:fontRef idx="minor">
+              <a:schemeClr val="tx1"/>
+            </a:fontRef>
+          </p:style>
+          <p:txBody>
+            <a:bodyPr rtlCol="0" anchor="ctr"/>
+            <a:lstStyle/>
+            <a:p>
+              <a:pPr algn="ctr"/>
+              <a:endParaRPr lang="de-DE"/>
+            </a:p>
+          </p:txBody>
+        </p:sp>
+        <mc:AlternateContent xmlns:mc="http://schemas.openxmlformats.org/markup-compatibility/2006" xmlns:p14="http://schemas.microsoft.com/office/powerpoint/2010/main">
+          <mc:Choice Requires="p14">
+            <p:contentPart p14:bwMode="auto" r:id="rId13">
+              <p14:nvContentPartPr>
+                <p14:cNvPr id="22" name="Freihand 21">
+                  <a:extLst>
+                    <a:ext uri="{FF2B5EF4-FFF2-40B4-BE49-F238E27FC236}">
+                      <a16:creationId xmlns:a16="http://schemas.microsoft.com/office/drawing/2014/main" id="{5062D448-F697-20DF-6189-E22432B4FFF9}"/>
+                    </a:ext>
+                  </a:extLst>
+                </p14:cNvPr>
+                <p14:cNvContentPartPr/>
+                <p14:nvPr/>
+              </p14:nvContentPartPr>
+              <p14:xfrm rot="12692638" flipV="1">
+                <a:off x="8487235" y="4476469"/>
+                <a:ext cx="88735" cy="165615"/>
+              </p14:xfrm>
+            </p:contentPart>
+          </mc:Choice>
+          <mc:Fallback xmlns="">
+            <p:pic>
+              <p:nvPicPr>
+                <p:cNvPr id="22" name="Freihand 21">
+                  <a:extLst>
+                    <a:ext uri="{FF2B5EF4-FFF2-40B4-BE49-F238E27FC236}">
+                      <a16:creationId xmlns:a16="http://schemas.microsoft.com/office/drawing/2014/main" id="{5062D448-F697-20DF-6189-E22432B4FFF9}"/>
+                    </a:ext>
+                  </a:extLst>
+                </p:cNvPr>
+                <p:cNvPicPr/>
+                <p:nvPr/>
+              </p:nvPicPr>
+              <p:blipFill>
+                <a:blip r:embed="rId14"/>
+                <a:stretch>
+                  <a:fillRect/>
+                </a:stretch>
+              </p:blipFill>
+              <p:spPr>
+                <a:xfrm rot="12692638" flipV="1">
+                  <a:off x="8484118" y="4471964"/>
+                  <a:ext cx="94968" cy="174624"/>
+                </a:xfrm>
+                <a:prstGeom prst="rect">
+                  <a:avLst/>
+                </a:prstGeom>
+              </p:spPr>
+            </p:pic>
+          </mc:Fallback>
+        </mc:AlternateContent>
+      </p:grpSp>
+      <p:cxnSp>
+        <p:nvCxnSpPr>
+          <p:cNvPr id="23" name="Gerade Verbindung mit Pfeil 22">
+            <a:extLst>
+              <a:ext uri="{FF2B5EF4-FFF2-40B4-BE49-F238E27FC236}">
+                <a16:creationId xmlns:a16="http://schemas.microsoft.com/office/drawing/2014/main" id="{C8878F27-E9F7-EDF3-DD38-3898AFAA1042}"/>
+              </a:ext>
+            </a:extLst>
+          </p:cNvPr>
+          <p:cNvCxnSpPr>
+            <a:cxnSpLocks/>
+          </p:cNvCxnSpPr>
+          <p:nvPr/>
+        </p:nvCxnSpPr>
+        <p:spPr>
+          <a:xfrm>
+            <a:off x="6311900" y="4296833"/>
+            <a:ext cx="1684867" cy="715434"/>
+          </a:xfrm>
+          <a:prstGeom prst="straightConnector1">
+            <a:avLst/>
+          </a:prstGeom>
+          <a:ln>
+            <a:headEnd type="none" w="med" len="med"/>
+            <a:tailEnd type="arrow" w="med" len="med"/>
+          </a:ln>
+        </p:spPr>
+        <p:style>
+          <a:lnRef idx="3">
+            <a:schemeClr val="dk1"/>
+          </a:lnRef>
+          <a:fillRef idx="0">
+            <a:schemeClr val="dk1"/>
+          </a:fillRef>
+          <a:effectRef idx="2">
+            <a:schemeClr val="dk1"/>
+          </a:effectRef>
+          <a:fontRef idx="minor">
+            <a:schemeClr val="tx1"/>
+          </a:fontRef>
+        </p:style>
+      </p:cxnSp>
     </p:spTree>
     <p:extLst>
       <p:ext uri="{BB962C8B-B14F-4D97-AF65-F5344CB8AC3E}">
@@ -8649,7 +8778,7 @@
                                           </p:stCondLst>
                                         </p:cTn>
                                         <p:tgtEl>
-                                          <p:spTgt spid="27"/>
+                                          <p:spTgt spid="5"/>
                                         </p:tgtEl>
                                         <p:attrNameLst>
                                           <p:attrName>style.visibility</p:attrName>
@@ -8681,7 +8810,7 @@
                             </p:stCondLst>
                             <p:childTnLst>
                               <p:par>
-                                <p:cTn id="11" presetID="1" presetClass="entr" presetSubtype="0" fill="hold" grpId="0" nodeType="clickEffect">
+                                <p:cTn id="11" presetID="1" presetClass="entr" presetSubtype="0" fill="hold" nodeType="clickEffect">
                                   <p:stCondLst>
                                     <p:cond delay="0"/>
                                   </p:stCondLst>
@@ -8689,6 +8818,141 @@
                                     <p:set>
                                       <p:cBhvr>
                                         <p:cTn id="12" dur="1" fill="hold">
+                                          <p:stCondLst>
+                                            <p:cond delay="0"/>
+                                          </p:stCondLst>
+                                        </p:cTn>
+                                        <p:tgtEl>
+                                          <p:spTgt spid="6"/>
+                                        </p:tgtEl>
+                                        <p:attrNameLst>
+                                          <p:attrName>style.visibility</p:attrName>
+                                        </p:attrNameLst>
+                                      </p:cBhvr>
+                                      <p:to>
+                                        <p:strVal val="visible"/>
+                                      </p:to>
+                                    </p:set>
+                                  </p:childTnLst>
+                                </p:cTn>
+                              </p:par>
+                            </p:childTnLst>
+                          </p:cTn>
+                        </p:par>
+                      </p:childTnLst>
+                    </p:cTn>
+                  </p:par>
+                  <p:par>
+                    <p:cTn id="13" fill="hold">
+                      <p:stCondLst>
+                        <p:cond delay="indefinite"/>
+                      </p:stCondLst>
+                      <p:childTnLst>
+                        <p:par>
+                          <p:cTn id="14" fill="hold">
+                            <p:stCondLst>
+                              <p:cond delay="0"/>
+                            </p:stCondLst>
+                            <p:childTnLst>
+                              <p:par>
+                                <p:cTn id="15" presetID="1" presetClass="entr" presetSubtype="0" fill="hold" nodeType="clickEffect">
+                                  <p:stCondLst>
+                                    <p:cond delay="0"/>
+                                  </p:stCondLst>
+                                  <p:childTnLst>
+                                    <p:set>
+                                      <p:cBhvr>
+                                        <p:cTn id="16" dur="1" fill="hold">
+                                          <p:stCondLst>
+                                            <p:cond delay="0"/>
+                                          </p:stCondLst>
+                                        </p:cTn>
+                                        <p:tgtEl>
+                                          <p:spTgt spid="9"/>
+                                        </p:tgtEl>
+                                        <p:attrNameLst>
+                                          <p:attrName>style.visibility</p:attrName>
+                                        </p:attrNameLst>
+                                      </p:cBhvr>
+                                      <p:to>
+                                        <p:strVal val="visible"/>
+                                      </p:to>
+                                    </p:set>
+                                  </p:childTnLst>
+                                </p:cTn>
+                              </p:par>
+                            </p:childTnLst>
+                          </p:cTn>
+                        </p:par>
+                      </p:childTnLst>
+                    </p:cTn>
+                  </p:par>
+                  <p:par>
+                    <p:cTn id="17" fill="hold">
+                      <p:stCondLst>
+                        <p:cond delay="indefinite"/>
+                      </p:stCondLst>
+                      <p:childTnLst>
+                        <p:par>
+                          <p:cTn id="18" fill="hold">
+                            <p:stCondLst>
+                              <p:cond delay="0"/>
+                            </p:stCondLst>
+                            <p:childTnLst>
+                              <p:par>
+                                <p:cTn id="19" presetID="1" presetClass="entr" presetSubtype="0" fill="hold" nodeType="clickEffect">
+                                  <p:stCondLst>
+                                    <p:cond delay="0"/>
+                                  </p:stCondLst>
+                                  <p:childTnLst>
+                                    <p:set>
+                                      <p:cBhvr>
+                                        <p:cTn id="20" dur="1" fill="hold">
+                                          <p:stCondLst>
+                                            <p:cond delay="0"/>
+                                          </p:stCondLst>
+                                        </p:cTn>
+                                        <p:tgtEl>
+                                          <p:spTgt spid="12"/>
+                                        </p:tgtEl>
+                                        <p:attrNameLst>
+                                          <p:attrName>style.visibility</p:attrName>
+                                        </p:attrNameLst>
+                                      </p:cBhvr>
+                                      <p:to>
+                                        <p:strVal val="visible"/>
+                                      </p:to>
+                                    </p:set>
+                                  </p:childTnLst>
+                                </p:cTn>
+                              </p:par>
+                            </p:childTnLst>
+                          </p:cTn>
+                        </p:par>
+                      </p:childTnLst>
+                    </p:cTn>
+                  </p:par>
+                  <p:par>
+                    <p:cTn id="21" fill="hold">
+                      <p:stCondLst>
+                        <p:cond delay="indefinite"/>
+                      </p:stCondLst>
+                      <p:childTnLst>
+                        <p:par>
+                          <p:cTn id="22" fill="hold">
+                            <p:stCondLst>
+                              <p:cond delay="0"/>
+                            </p:stCondLst>
+                            <p:childTnLst>
+                              <p:par>
+                                <p:cTn id="23" presetID="1" presetClass="entr" presetSubtype="0" fill="hold" grpId="0" nodeType="clickEffect">
+                                  <p:stCondLst>
+                                    <p:cond delay="0"/>
+                                  </p:stCondLst>
+                                  <p:childTnLst>
+                                    <p:set>
+                                      <p:cBhvr>
+                                        <p:cTn id="24" dur="1" fill="hold">
                                           <p:stCondLst>
                                             <p:cond delay="0"/>
                                           </p:stCondLst>
@@ -8712,20 +8976,155 @@
                                 </p:cTn>
                               </p:par>
                               <p:par>
-                                <p:cTn id="13" presetID="1" presetClass="entr" presetSubtype="0" fill="hold" nodeType="withEffect">
+                                <p:cTn id="25" presetID="1" presetClass="entr" presetSubtype="0" fill="hold" nodeType="withEffect">
                                   <p:stCondLst>
                                     <p:cond delay="0"/>
                                   </p:stCondLst>
                                   <p:childTnLst>
                                     <p:set>
                                       <p:cBhvr>
-                                        <p:cTn id="14" dur="1" fill="hold">
+                                        <p:cTn id="26" dur="1" fill="hold">
                                           <p:stCondLst>
                                             <p:cond delay="0"/>
                                           </p:stCondLst>
                                         </p:cTn>
                                         <p:tgtEl>
-                                          <p:spTgt spid="26"/>
+                                          <p:spTgt spid="16"/>
+                                        </p:tgtEl>
+                                        <p:attrNameLst>
+                                          <p:attrName>style.visibility</p:attrName>
+                                        </p:attrNameLst>
+                                      </p:cBhvr>
+                                      <p:to>
+                                        <p:strVal val="visible"/>
+                                      </p:to>
+                                    </p:set>
+                                  </p:childTnLst>
+                                </p:cTn>
+                              </p:par>
+                            </p:childTnLst>
+                          </p:cTn>
+                        </p:par>
+                      </p:childTnLst>
+                    </p:cTn>
+                  </p:par>
+                  <p:par>
+                    <p:cTn id="27" fill="hold">
+                      <p:stCondLst>
+                        <p:cond delay="indefinite"/>
+                      </p:stCondLst>
+                      <p:childTnLst>
+                        <p:par>
+                          <p:cTn id="28" fill="hold">
+                            <p:stCondLst>
+                              <p:cond delay="0"/>
+                            </p:stCondLst>
+                            <p:childTnLst>
+                              <p:par>
+                                <p:cTn id="29" presetID="1" presetClass="entr" presetSubtype="0" fill="hold" nodeType="clickEffect">
+                                  <p:stCondLst>
+                                    <p:cond delay="0"/>
+                                  </p:stCondLst>
+                                  <p:childTnLst>
+                                    <p:set>
+                                      <p:cBhvr>
+                                        <p:cTn id="30" dur="1" fill="hold">
+                                          <p:stCondLst>
+                                            <p:cond delay="0"/>
+                                          </p:stCondLst>
+                                        </p:cTn>
+                                        <p:tgtEl>
+                                          <p:spTgt spid="17"/>
+                                        </p:tgtEl>
+                                        <p:attrNameLst>
+                                          <p:attrName>style.visibility</p:attrName>
+                                        </p:attrNameLst>
+                                      </p:cBhvr>
+                                      <p:to>
+                                        <p:strVal val="visible"/>
+                                      </p:to>
+                                    </p:set>
+                                  </p:childTnLst>
+                                </p:cTn>
+                              </p:par>
+                            </p:childTnLst>
+                          </p:cTn>
+                        </p:par>
+                      </p:childTnLst>
+                    </p:cTn>
+                  </p:par>
+                  <p:par>
+                    <p:cTn id="31" fill="hold">
+                      <p:stCondLst>
+                        <p:cond delay="indefinite"/>
+                      </p:stCondLst>
+                      <p:childTnLst>
+                        <p:par>
+                          <p:cTn id="32" fill="hold">
+                            <p:stCondLst>
+                              <p:cond delay="0"/>
+                            </p:stCondLst>
+                            <p:childTnLst>
+                              <p:par>
+                                <p:cTn id="33" presetID="1" presetClass="entr" presetSubtype="0" fill="hold" nodeType="clickEffect">
+                                  <p:stCondLst>
+                                    <p:cond delay="0"/>
+                                  </p:stCondLst>
+                                  <p:childTnLst>
+                                    <p:set>
+                                      <p:cBhvr>
+                                        <p:cTn id="34" dur="1" fill="hold">
+                                          <p:stCondLst>
+                                            <p:cond delay="0"/>
+                                          </p:stCondLst>
+                                        </p:cTn>
+                                        <p:tgtEl>
+                                          <p:spTgt spid="20"/>
+                                        </p:tgtEl>
+                                        <p:attrNameLst>
+                                          <p:attrName>style.visibility</p:attrName>
+                                        </p:attrNameLst>
+                                      </p:cBhvr>
+                                      <p:to>
+                                        <p:strVal val="visible"/>
+                                      </p:to>
+                                    </p:set>
+                                  </p:childTnLst>
+                                </p:cTn>
+                              </p:par>
+                            </p:childTnLst>
+                          </p:cTn>
+                        </p:par>
+                      </p:childTnLst>
+                    </p:cTn>
+                  </p:par>
+                  <p:par>
+                    <p:cTn id="35" fill="hold">
+                      <p:stCondLst>
+                        <p:cond delay="indefinite"/>
+                      </p:stCondLst>
+                      <p:childTnLst>
+                        <p:par>
+                          <p:cTn id="36" fill="hold">
+                            <p:stCondLst>
+                              <p:cond delay="0"/>
+                            </p:stCondLst>
+                            <p:childTnLst>
+                              <p:par>
+                                <p:cTn id="37" presetID="1" presetClass="entr" presetSubtype="0" fill="hold" nodeType="clickEffect">
+                                  <p:stCondLst>
+                                    <p:cond delay="0"/>
+                                  </p:stCondLst>
+                                  <p:childTnLst>
+                                    <p:set>
+                                      <p:cBhvr>
+                                        <p:cTn id="38" dur="1" fill="hold">
+                                          <p:stCondLst>
+                                            <p:cond delay="0"/>
+                                          </p:stCondLst>
+                                        </p:cTn>
+                                        <p:tgtEl>
+                                          <p:spTgt spid="23"/>
                                         </p:tgtEl>
                                         <p:attrNameLst>
                                           <p:attrName>style.visibility</p:attrName>
@@ -10829,7 +11228,7 @@
         </p:nvSpPr>
         <p:spPr>
           <a:xfrm>
-            <a:off x="838200" y="1112107"/>
+            <a:off x="838199" y="973254"/>
             <a:ext cx="10515600" cy="1325563"/>
           </a:xfrm>
         </p:spPr>
@@ -10874,7 +11273,7 @@
         </p:blipFill>
         <p:spPr>
           <a:xfrm>
-            <a:off x="4023196" y="2657632"/>
+            <a:off x="4023196" y="2298817"/>
             <a:ext cx="4145607" cy="4058636"/>
           </a:xfrm>
           <a:prstGeom prst="rect">
